--- a/presentations/PF_L07_RevisionHQ22_Lesson.pptx
+++ b/presentations/PF_L07_RevisionHQ22_Lesson.pptx
@@ -19,9 +19,10 @@
     <p:sldId id="267" r:id="rId13"/>
     <p:sldId id="268" r:id="rId14"/>
     <p:sldId id="269" r:id="rId15"/>
+    <p:sldId id="270" r:id="rId16"/>
   </p:sldIdLst>
   <p:notesMasterIdLst>
-    <p:notesMasterId r:id="rId16"/>
+    <p:notesMasterId r:id="rId17"/>
   </p:notesMasterIdLst>
   <p:sldSz cx="12192000" cy="6858000"/>
   <p:notesSz cx="6858000" cy="12192000"/>
@@ -692,7 +693,13 @@
           <a:p>
             <a:r>
               <a:rPr lang="en-US" dirty="0"/>
-              <a:t>Make them commit to an answer on paper before they tap the star. Guessing first costs them the learning.</a:t>
+              <a:t>The answer is C: SELECT Name FROM Pupils WHERE Year = 10 AND Choir = True;.
+Do not say it yet. Every pupil commits first - fingers, whiteboards or a show of hands on each letter in turn - and you count the split before anyone can change their mind.
+IF MOST OF THE CLASS IS RIGHT: say why it is right in one sentence and go straight on to the independent work.
+IF A SIGNIFICANT GROUP IS ON ONE WRONG LETTER: that option is the misconception to teach against before anyone goes on. Go back to station 4, Records and SQL recap, and work through its example again, aloud, with the class watching, then re-ask this question.
+The course's own response to a wrong answer here: Both conditions must be True at the same time, and AND is the operator that demands that.
+A limitation, stated rather than papered over: one response covers every wrong option; it does not say what to revisit for each one. The course does not record what each separate wrong option means, and this slide does not invent it. Decide your own reteach for each option before the lesson; the options above are the start of it.
+This is a real activity from the experience (pf-l07-s4-c1), so the wording here is the wording a pupil will see.</a:t>
             </a:r>
             <a:endParaRPr lang="en-US" dirty="0"/>
           </a:p>
@@ -780,7 +787,7 @@
           <a:p>
             <a:r>
               <a:rPr lang="en-US" dirty="0"/>
-              <a:t>Use these as a settler, or as something for early finishers to read in the experience.</a:t>
+              <a:t>Make them commit to an answer on paper before they tap the star. Guessing first costs them the learning.</a:t>
             </a:r>
             <a:endParaRPr lang="en-US" dirty="0"/>
           </a:p>
@@ -868,7 +875,7 @@
           <a:p>
             <a:r>
               <a:rPr lang="en-US" dirty="0"/>
-              <a:t>Timed and silent. Mark against the answer sheet, then ask students to record their weakest area.</a:t>
+              <a:t>Use these as a settler, or as something for early finishers to read in the experience.</a:t>
             </a:r>
             <a:endParaRPr lang="en-US" dirty="0"/>
           </a:p>
@@ -956,7 +963,7 @@
           <a:p>
             <a:r>
               <a:rPr lang="en-US" dirty="0"/>
-              <a:t>Students copy their score-screen breakdown onto the worksheet, then rate themselves here.</a:t>
+              <a:t>Timed and silent. Mark against the answer sheet, then ask students to record their weakest area.</a:t>
             </a:r>
             <a:endParaRPr lang="en-US" dirty="0"/>
           </a:p>
@@ -980,6 +987,94 @@
             <a:fld id="{F7021451-1387-4CA6-816F-3879F97B5CBC}" type="slidenum">
               <a:rPr lang="en-US"/>
               <a:t>14</a:t>
+            </a:fld>
+            <a:endParaRPr lang="en-US"/>
+          </a:p>
+        </p:txBody>
+      </p:sp>
+    </p:spTree>
+    <p:extLst>
+      <p:ext uri="{BB962C8B-B14F-4D97-AF65-F5344CB8AC3E}">
+        <p14:creationId xmlns:p14="http://schemas.microsoft.com/office/powerpoint/2010/main" val="1024086991"/>
+      </p:ext>
+    </p:extLst>
+  </p:cSld>
+  <p:clrMapOvr>
+    <a:masterClrMapping/>
+  </p:clrMapOvr>
+</p:notes>
+</file>
+
+<file path=ppt/notesSlides/notesSlide15.xml><?xml version="1.0" encoding="utf-8"?>
+<p:notes xmlns:a="http://schemas.openxmlformats.org/drawingml/2006/main" xmlns:r="http://schemas.openxmlformats.org/officeDocument/2006/relationships" xmlns:p="http://schemas.openxmlformats.org/presentationml/2006/main">
+  <p:cSld>
+    <p:spTree>
+      <p:nvGrpSpPr>
+        <p:cNvPr id="1" name=""/>
+        <p:cNvGrpSpPr/>
+        <p:nvPr/>
+      </p:nvGrpSpPr>
+      <p:grpSpPr>
+        <a:xfrm>
+          <a:off x="0" y="0"/>
+          <a:ext cx="0" cy="0"/>
+          <a:chOff x="0" y="0"/>
+          <a:chExt cx="0" cy="0"/>
+        </a:xfrm>
+      </p:grpSpPr>
+      <p:sp>
+        <p:nvSpPr>
+          <p:cNvPr id="2" name="Slide Image Placeholder 1"/>
+          <p:cNvSpPr>
+            <a:spLocks noGrp="1" noRot="1" noChangeAspect="1"/>
+          </p:cNvSpPr>
+          <p:nvPr>
+            <p:ph type="sldImg"/>
+          </p:nvPr>
+        </p:nvSpPr>
+        <p:spPr/>
+      </p:sp>
+      <p:sp>
+        <p:nvSpPr>
+          <p:cNvPr id="3" name="Notes Placeholder 2"/>
+          <p:cNvSpPr>
+            <a:spLocks noGrp="1"/>
+          </p:cNvSpPr>
+          <p:nvPr>
+            <p:ph type="body" idx="1"/>
+          </p:nvPr>
+        </p:nvSpPr>
+        <p:spPr/>
+        <p:txBody>
+          <a:bodyPr/>
+          <a:lstStyle/>
+          <a:p>
+            <a:r>
+              <a:rPr lang="en-US" dirty="0"/>
+              <a:t>Students copy their score-screen breakdown onto the worksheet, then rate themselves here.</a:t>
+            </a:r>
+            <a:endParaRPr lang="en-US" dirty="0"/>
+          </a:p>
+        </p:txBody>
+      </p:sp>
+      <p:sp>
+        <p:nvSpPr>
+          <p:cNvPr id="4" name="Slide Number Placeholder 3"/>
+          <p:cNvSpPr>
+            <a:spLocks noGrp="1"/>
+          </p:cNvSpPr>
+          <p:nvPr>
+            <p:ph type="sldNum" sz="quarter" idx="10"/>
+          </p:nvPr>
+        </p:nvSpPr>
+        <p:spPr/>
+        <p:txBody>
+          <a:bodyPr/>
+          <a:lstStyle/>
+          <a:p>
+            <a:fld id="{F7021451-1387-4CA6-816F-3879F97B5CBC}" type="slidenum">
+              <a:rPr lang="en-US"/>
+              <a:t>15</a:t>
             </a:fld>
             <a:endParaRPr lang="en-US"/>
           </a:p>
@@ -2949,12 +3044,12 @@
         </p:nvSpPr>
         <p:spPr>
           <a:xfrm>
-            <a:off x="502920" y="438912"/>
-            <a:ext cx="3108960" cy="502920"/>
+            <a:off x="502920" y="457200"/>
+            <a:ext cx="1051560" cy="420624"/>
           </a:xfrm>
           <a:prstGeom prst="roundRect">
             <a:avLst>
-              <a:gd name="adj" fmla="val 18182"/>
+              <a:gd name="adj" fmla="val 21739"/>
             </a:avLst>
           </a:prstGeom>
           <a:solidFill>
@@ -2971,8 +3066,8 @@
         </p:nvSpPr>
         <p:spPr>
           <a:xfrm>
-            <a:off x="502920" y="438912"/>
-            <a:ext cx="3108960" cy="502920"/>
+            <a:off x="502920" y="457200"/>
+            <a:ext cx="1051560" cy="420624"/>
           </a:xfrm>
           <a:prstGeom prst="rect">
             <a:avLst/>
@@ -2988,7 +3083,7 @@
               <a:buNone/>
             </a:pPr>
             <a:r>
-              <a:rPr lang="en-US" sz="1300" b="1" dirty="0">
+              <a:rPr lang="en-US" sz="1200" b="1" dirty="0">
                 <a:solidFill>
                   <a:srgbClr val="101828"/>
                 </a:solidFill>
@@ -2996,9 +3091,9 @@
                 <a:ea typeface="IBM Plex Mono" pitchFamily="34" charset="-122"/>
                 <a:cs typeface="IBM Plex Mono" pitchFamily="34" charset="-120"/>
               </a:rPr>
-              <a:t>★  FINAL CHALLENGE</a:t>
-            </a:r>
-            <a:endParaRPr lang="en-US" sz="1300" dirty="0"/>
+              <a:t>CHECK</a:t>
+            </a:r>
+            <a:endParaRPr lang="en-US" sz="1200" dirty="0"/>
           </a:p>
         </p:txBody>
       </p:sp>
@@ -3010,8 +3105,8 @@
         </p:nvSpPr>
         <p:spPr>
           <a:xfrm>
-            <a:off x="502920" y="1097280"/>
-            <a:ext cx="11155680" cy="731520"/>
+            <a:off x="1737360" y="457200"/>
+            <a:ext cx="9875520" cy="420624"/>
           </a:xfrm>
           <a:prstGeom prst="rect">
             <a:avLst/>
@@ -3027,34 +3122,76 @@
               <a:buNone/>
             </a:pPr>
             <a:r>
-              <a:rPr lang="en-US" sz="3400" b="1" dirty="0">
-                <a:solidFill>
-                  <a:srgbClr val="101828"/>
+              <a:rPr lang="en-US" sz="1500" dirty="0">
+                <a:solidFill>
+                  <a:srgbClr val="667085"/>
                 </a:solidFill>
                 <a:latin typeface="IBM Plex Sans" pitchFamily="34" charset="0"/>
                 <a:ea typeface="IBM Plex Sans" pitchFamily="34" charset="-122"/>
                 <a:cs typeface="IBM Plex Sans" pitchFamily="34" charset="-120"/>
               </a:rPr>
-              <a:t>The lane draw</a:t>
-            </a:r>
-            <a:endParaRPr lang="en-US" sz="3400" dirty="0"/>
-          </a:p>
-        </p:txBody>
-      </p:sp>
-      <p:sp>
-        <p:nvSpPr>
-          <p:cNvPr id="8" name="Shape 6"/>
+              <a:t>Hands down. Everyone commits.</a:t>
+            </a:r>
+            <a:endParaRPr lang="en-US" sz="1500" dirty="0"/>
+          </a:p>
+        </p:txBody>
+      </p:sp>
+      <p:sp>
+        <p:nvSpPr>
+          <p:cNvPr id="8" name="Text 6"/>
+          <p:cNvSpPr txBox="1"/>
+          <p:nvPr/>
+        </p:nvSpPr>
+        <p:spPr>
+          <a:xfrm>
+            <a:off x="502920" y="1097280"/>
+            <a:ext cx="11155680" cy="914400"/>
+          </a:xfrm>
+          <a:prstGeom prst="rect">
+            <a:avLst/>
+          </a:prstGeom>
+          <a:noFill/>
+          <a:ln/>
+        </p:spPr>
+        <p:txBody>
+          <a:bodyPr wrap="square" lIns="0" tIns="0" rIns="0" bIns="0" rtlCol="0" anchor="ctr"/>
+          <a:lstStyle/>
+          <a:p>
+            <a:pPr indent="0" marL="0">
+              <a:lnSpc>
+                <a:spcPct val="115000"/>
+              </a:lnSpc>
+              <a:buNone/>
+            </a:pPr>
+            <a:r>
+              <a:rPr lang="en-US" sz="2600" b="1" dirty="0">
+                <a:solidFill>
+                  <a:srgbClr val="101828"/>
+                </a:solidFill>
+                <a:latin typeface="IBM Plex Sans" pitchFamily="34" charset="0"/>
+                <a:ea typeface="IBM Plex Sans" pitchFamily="34" charset="-122"/>
+                <a:cs typeface="IBM Plex Sans" pitchFamily="34" charset="-120"/>
+              </a:rPr>
+              <a:t>A table called Pupils has the fields Name, Year and Choir. Which query returns the names of pupils who are in Year 10 and in the choir?</a:t>
+            </a:r>
+            <a:endParaRPr lang="en-US" sz="2600" dirty="0"/>
+          </a:p>
+        </p:txBody>
+      </p:sp>
+      <p:sp>
+        <p:nvSpPr>
+          <p:cNvPr id="9" name="Shape 7"/>
           <p:cNvSpPr/>
           <p:nvPr/>
         </p:nvSpPr>
         <p:spPr>
           <a:xfrm>
-            <a:off x="502920" y="2011680"/>
-            <a:ext cx="11155680" cy="2194560"/>
+            <a:off x="502920" y="2148840"/>
+            <a:ext cx="11155680" cy="731520"/>
           </a:xfrm>
           <a:prstGeom prst="roundRect">
             <a:avLst>
-              <a:gd name="adj" fmla="val 5000"/>
+              <a:gd name="adj" fmla="val 15000"/>
             </a:avLst>
           </a:prstGeom>
           <a:solidFill>
@@ -3062,7 +3199,7 @@
           </a:solidFill>
           <a:ln w="15875">
             <a:solidFill>
-              <a:srgbClr val="2D63FF"/>
+              <a:srgbClr val="D9DEE7"/>
             </a:solidFill>
             <a:prstDash val="solid"/>
           </a:ln>
@@ -3070,14 +3207,75 @@
       </p:sp>
       <p:sp>
         <p:nvSpPr>
-          <p:cNvPr id="9" name="Text 7"/>
-          <p:cNvSpPr txBox="1"/>
-          <p:nvPr/>
-        </p:nvSpPr>
-        <p:spPr>
-          <a:xfrm>
-            <a:off x="1005840" y="2331720"/>
-            <a:ext cx="10149840" cy="1554480"/>
+          <p:cNvPr id="10" name="Shape 8"/>
+          <p:cNvSpPr/>
+          <p:nvPr/>
+        </p:nvSpPr>
+        <p:spPr>
+          <a:xfrm>
+            <a:off x="777240" y="2295144"/>
+            <a:ext cx="438912" cy="438912"/>
+          </a:xfrm>
+          <a:prstGeom prst="roundRect">
+            <a:avLst>
+              <a:gd name="adj" fmla="val 20833"/>
+            </a:avLst>
+          </a:prstGeom>
+          <a:solidFill>
+            <a:srgbClr val="EEF2FB"/>
+          </a:solidFill>
+          <a:ln/>
+        </p:spPr>
+      </p:sp>
+      <p:sp>
+        <p:nvSpPr>
+          <p:cNvPr id="11" name="Text 9"/>
+          <p:cNvSpPr txBox="1"/>
+          <p:nvPr/>
+        </p:nvSpPr>
+        <p:spPr>
+          <a:xfrm>
+            <a:off x="777240" y="2295144"/>
+            <a:ext cx="438912" cy="438912"/>
+          </a:xfrm>
+          <a:prstGeom prst="rect">
+            <a:avLst/>
+          </a:prstGeom>
+          <a:noFill/>
+          <a:ln/>
+        </p:spPr>
+        <p:txBody>
+          <a:bodyPr wrap="square" lIns="0" tIns="0" rIns="0" bIns="0" rtlCol="0" anchor="ctr"/>
+          <a:lstStyle/>
+          <a:p>
+            <a:pPr algn="ctr" indent="0" marL="0">
+              <a:buNone/>
+            </a:pPr>
+            <a:r>
+              <a:rPr lang="en-US" sz="1300" b="1" dirty="0">
+                <a:solidFill>
+                  <a:srgbClr val="2D63FF"/>
+                </a:solidFill>
+                <a:latin typeface="IBM Plex Mono" pitchFamily="34" charset="0"/>
+                <a:ea typeface="IBM Plex Mono" pitchFamily="34" charset="-122"/>
+                <a:cs typeface="IBM Plex Mono" pitchFamily="34" charset="-120"/>
+              </a:rPr>
+              <a:t>A</a:t>
+            </a:r>
+            <a:endParaRPr lang="en-US" sz="1300" dirty="0"/>
+          </a:p>
+        </p:txBody>
+      </p:sp>
+      <p:sp>
+        <p:nvSpPr>
+          <p:cNvPr id="12" name="Text 10"/>
+          <p:cNvSpPr txBox="1"/>
+          <p:nvPr/>
+        </p:nvSpPr>
+        <p:spPr>
+          <a:xfrm>
+            <a:off x="1417320" y="2148840"/>
+            <a:ext cx="10058400" cy="731520"/>
           </a:xfrm>
           <a:prstGeom prst="rect">
             <a:avLst/>
@@ -3091,12 +3289,12 @@
           <a:p>
             <a:pPr indent="0" marL="0">
               <a:lnSpc>
-                <a:spcPct val="130000"/>
+                <a:spcPct val="115000"/>
               </a:lnSpc>
               <a:buNone/>
             </a:pPr>
             <a:r>
-              <a:rPr lang="en-US" sz="2200" dirty="0">
+              <a:rPr lang="en-US" sz="1700" dirty="0">
                 <a:solidFill>
                   <a:srgbClr val="101828"/>
                 </a:solidFill>
@@ -3104,22 +3302,110 @@
                 <a:ea typeface="IBM Plex Sans" pitchFamily="34" charset="-122"/>
                 <a:cs typeface="IBM Plex Sans" pitchFamily="34" charset="-120"/>
               </a:rPr>
-              <a:t>Sports day needs a fair draw. Eight runners' names are stored in a file, and the program must give each of them a different lane from 1 to 8, chosen at random, then save the finished list. Tap the star and build it.</a:t>
-            </a:r>
-            <a:endParaRPr lang="en-US" sz="2200" dirty="0"/>
-          </a:p>
-        </p:txBody>
-      </p:sp>
-      <p:sp>
-        <p:nvSpPr>
-          <p:cNvPr id="10" name="Text 8"/>
-          <p:cNvSpPr txBox="1"/>
-          <p:nvPr/>
-        </p:nvSpPr>
-        <p:spPr>
-          <a:xfrm>
-            <a:off x="502920" y="4526280"/>
-            <a:ext cx="11155680" cy="457200"/>
+              <a:t>SELECT Year, Choir FROM Pupils WHERE Name = 'Year 10';</a:t>
+            </a:r>
+            <a:endParaRPr lang="en-US" sz="1700" dirty="0"/>
+          </a:p>
+        </p:txBody>
+      </p:sp>
+      <p:sp>
+        <p:nvSpPr>
+          <p:cNvPr id="13" name="Shape 11"/>
+          <p:cNvSpPr/>
+          <p:nvPr/>
+        </p:nvSpPr>
+        <p:spPr>
+          <a:xfrm>
+            <a:off x="502920" y="3017520"/>
+            <a:ext cx="11155680" cy="731520"/>
+          </a:xfrm>
+          <a:prstGeom prst="roundRect">
+            <a:avLst>
+              <a:gd name="adj" fmla="val 15000"/>
+            </a:avLst>
+          </a:prstGeom>
+          <a:solidFill>
+            <a:srgbClr val="FFFFFF"/>
+          </a:solidFill>
+          <a:ln w="15875">
+            <a:solidFill>
+              <a:srgbClr val="D9DEE7"/>
+            </a:solidFill>
+            <a:prstDash val="solid"/>
+          </a:ln>
+        </p:spPr>
+      </p:sp>
+      <p:sp>
+        <p:nvSpPr>
+          <p:cNvPr id="14" name="Shape 12"/>
+          <p:cNvSpPr/>
+          <p:nvPr/>
+        </p:nvSpPr>
+        <p:spPr>
+          <a:xfrm>
+            <a:off x="777240" y="3163824"/>
+            <a:ext cx="438912" cy="438912"/>
+          </a:xfrm>
+          <a:prstGeom prst="roundRect">
+            <a:avLst>
+              <a:gd name="adj" fmla="val 20833"/>
+            </a:avLst>
+          </a:prstGeom>
+          <a:solidFill>
+            <a:srgbClr val="EEF2FB"/>
+          </a:solidFill>
+          <a:ln/>
+        </p:spPr>
+      </p:sp>
+      <p:sp>
+        <p:nvSpPr>
+          <p:cNvPr id="15" name="Text 13"/>
+          <p:cNvSpPr txBox="1"/>
+          <p:nvPr/>
+        </p:nvSpPr>
+        <p:spPr>
+          <a:xfrm>
+            <a:off x="777240" y="3163824"/>
+            <a:ext cx="438912" cy="438912"/>
+          </a:xfrm>
+          <a:prstGeom prst="rect">
+            <a:avLst/>
+          </a:prstGeom>
+          <a:noFill/>
+          <a:ln/>
+        </p:spPr>
+        <p:txBody>
+          <a:bodyPr wrap="square" lIns="0" tIns="0" rIns="0" bIns="0" rtlCol="0" anchor="ctr"/>
+          <a:lstStyle/>
+          <a:p>
+            <a:pPr algn="ctr" indent="0" marL="0">
+              <a:buNone/>
+            </a:pPr>
+            <a:r>
+              <a:rPr lang="en-US" sz="1300" b="1" dirty="0">
+                <a:solidFill>
+                  <a:srgbClr val="2D63FF"/>
+                </a:solidFill>
+                <a:latin typeface="IBM Plex Mono" pitchFamily="34" charset="0"/>
+                <a:ea typeface="IBM Plex Mono" pitchFamily="34" charset="-122"/>
+                <a:cs typeface="IBM Plex Mono" pitchFamily="34" charset="-120"/>
+              </a:rPr>
+              <a:t>B</a:t>
+            </a:r>
+            <a:endParaRPr lang="en-US" sz="1300" dirty="0"/>
+          </a:p>
+        </p:txBody>
+      </p:sp>
+      <p:sp>
+        <p:nvSpPr>
+          <p:cNvPr id="16" name="Text 14"/>
+          <p:cNvSpPr txBox="1"/>
+          <p:nvPr/>
+        </p:nvSpPr>
+        <p:spPr>
+          <a:xfrm>
+            <a:off x="1417320" y="3017520"/>
+            <a:ext cx="10058400" cy="731520"/>
           </a:xfrm>
           <a:prstGeom prst="rect">
             <a:avLst/>
@@ -3132,20 +3418,283 @@
           <a:lstStyle/>
           <a:p>
             <a:pPr indent="0" marL="0">
-              <a:buNone/>
-            </a:pPr>
-            <a:r>
-              <a:rPr lang="en-US" sz="1600" dirty="0">
-                <a:solidFill>
-                  <a:srgbClr val="667085"/>
+              <a:lnSpc>
+                <a:spcPct val="115000"/>
+              </a:lnSpc>
+              <a:buNone/>
+            </a:pPr>
+            <a:r>
+              <a:rPr lang="en-US" sz="1700" dirty="0">
+                <a:solidFill>
+                  <a:srgbClr val="101828"/>
                 </a:solidFill>
                 <a:latin typeface="IBM Plex Sans" pitchFamily="34" charset="0"/>
                 <a:ea typeface="IBM Plex Sans" pitchFamily="34" charset="-122"/>
                 <a:cs typeface="IBM Plex Sans" pitchFamily="34" charset="-120"/>
               </a:rPr>
-              <a:t>Predict on paper first, then look down and test it.</a:t>
-            </a:r>
-            <a:endParaRPr lang="en-US" sz="1600" dirty="0"/>
+              <a:t>SELECT Name FROM Pupils LIKE Year = 10 AND Choir = True;</a:t>
+            </a:r>
+            <a:endParaRPr lang="en-US" sz="1700" dirty="0"/>
+          </a:p>
+        </p:txBody>
+      </p:sp>
+      <p:sp>
+        <p:nvSpPr>
+          <p:cNvPr id="17" name="Shape 15"/>
+          <p:cNvSpPr/>
+          <p:nvPr/>
+        </p:nvSpPr>
+        <p:spPr>
+          <a:xfrm>
+            <a:off x="502920" y="3886200"/>
+            <a:ext cx="11155680" cy="731520"/>
+          </a:xfrm>
+          <a:prstGeom prst="roundRect">
+            <a:avLst>
+              <a:gd name="adj" fmla="val 15000"/>
+            </a:avLst>
+          </a:prstGeom>
+          <a:solidFill>
+            <a:srgbClr val="FFFFFF"/>
+          </a:solidFill>
+          <a:ln w="15875">
+            <a:solidFill>
+              <a:srgbClr val="D9DEE7"/>
+            </a:solidFill>
+            <a:prstDash val="solid"/>
+          </a:ln>
+        </p:spPr>
+      </p:sp>
+      <p:sp>
+        <p:nvSpPr>
+          <p:cNvPr id="18" name="Shape 16"/>
+          <p:cNvSpPr/>
+          <p:nvPr/>
+        </p:nvSpPr>
+        <p:spPr>
+          <a:xfrm>
+            <a:off x="777240" y="4032504"/>
+            <a:ext cx="438912" cy="438912"/>
+          </a:xfrm>
+          <a:prstGeom prst="roundRect">
+            <a:avLst>
+              <a:gd name="adj" fmla="val 20833"/>
+            </a:avLst>
+          </a:prstGeom>
+          <a:solidFill>
+            <a:srgbClr val="EEF2FB"/>
+          </a:solidFill>
+          <a:ln/>
+        </p:spPr>
+      </p:sp>
+      <p:sp>
+        <p:nvSpPr>
+          <p:cNvPr id="19" name="Text 17"/>
+          <p:cNvSpPr txBox="1"/>
+          <p:nvPr/>
+        </p:nvSpPr>
+        <p:spPr>
+          <a:xfrm>
+            <a:off x="777240" y="4032504"/>
+            <a:ext cx="438912" cy="438912"/>
+          </a:xfrm>
+          <a:prstGeom prst="rect">
+            <a:avLst/>
+          </a:prstGeom>
+          <a:noFill/>
+          <a:ln/>
+        </p:spPr>
+        <p:txBody>
+          <a:bodyPr wrap="square" lIns="0" tIns="0" rIns="0" bIns="0" rtlCol="0" anchor="ctr"/>
+          <a:lstStyle/>
+          <a:p>
+            <a:pPr algn="ctr" indent="0" marL="0">
+              <a:buNone/>
+            </a:pPr>
+            <a:r>
+              <a:rPr lang="en-US" sz="1300" b="1" dirty="0">
+                <a:solidFill>
+                  <a:srgbClr val="2D63FF"/>
+                </a:solidFill>
+                <a:latin typeface="IBM Plex Mono" pitchFamily="34" charset="0"/>
+                <a:ea typeface="IBM Plex Mono" pitchFamily="34" charset="-122"/>
+                <a:cs typeface="IBM Plex Mono" pitchFamily="34" charset="-120"/>
+              </a:rPr>
+              <a:t>C</a:t>
+            </a:r>
+            <a:endParaRPr lang="en-US" sz="1300" dirty="0"/>
+          </a:p>
+        </p:txBody>
+      </p:sp>
+      <p:sp>
+        <p:nvSpPr>
+          <p:cNvPr id="20" name="Text 18"/>
+          <p:cNvSpPr txBox="1"/>
+          <p:nvPr/>
+        </p:nvSpPr>
+        <p:spPr>
+          <a:xfrm>
+            <a:off x="1417320" y="3886200"/>
+            <a:ext cx="10058400" cy="731520"/>
+          </a:xfrm>
+          <a:prstGeom prst="rect">
+            <a:avLst/>
+          </a:prstGeom>
+          <a:noFill/>
+          <a:ln/>
+        </p:spPr>
+        <p:txBody>
+          <a:bodyPr wrap="square" lIns="0" tIns="0" rIns="0" bIns="0" rtlCol="0" anchor="ctr"/>
+          <a:lstStyle/>
+          <a:p>
+            <a:pPr indent="0" marL="0">
+              <a:lnSpc>
+                <a:spcPct val="115000"/>
+              </a:lnSpc>
+              <a:buNone/>
+            </a:pPr>
+            <a:r>
+              <a:rPr lang="en-US" sz="1700" dirty="0">
+                <a:solidFill>
+                  <a:srgbClr val="101828"/>
+                </a:solidFill>
+                <a:latin typeface="IBM Plex Sans" pitchFamily="34" charset="0"/>
+                <a:ea typeface="IBM Plex Sans" pitchFamily="34" charset="-122"/>
+                <a:cs typeface="IBM Plex Sans" pitchFamily="34" charset="-120"/>
+              </a:rPr>
+              <a:t>SELECT Name FROM Pupils WHERE Year = 10 AND Choir = True;</a:t>
+            </a:r>
+            <a:endParaRPr lang="en-US" sz="1700" dirty="0"/>
+          </a:p>
+        </p:txBody>
+      </p:sp>
+      <p:sp>
+        <p:nvSpPr>
+          <p:cNvPr id="21" name="Shape 19"/>
+          <p:cNvSpPr/>
+          <p:nvPr/>
+        </p:nvSpPr>
+        <p:spPr>
+          <a:xfrm>
+            <a:off x="502920" y="4754880"/>
+            <a:ext cx="11155680" cy="731520"/>
+          </a:xfrm>
+          <a:prstGeom prst="roundRect">
+            <a:avLst>
+              <a:gd name="adj" fmla="val 15000"/>
+            </a:avLst>
+          </a:prstGeom>
+          <a:solidFill>
+            <a:srgbClr val="FFFFFF"/>
+          </a:solidFill>
+          <a:ln w="15875">
+            <a:solidFill>
+              <a:srgbClr val="D9DEE7"/>
+            </a:solidFill>
+            <a:prstDash val="solid"/>
+          </a:ln>
+        </p:spPr>
+      </p:sp>
+      <p:sp>
+        <p:nvSpPr>
+          <p:cNvPr id="22" name="Shape 20"/>
+          <p:cNvSpPr/>
+          <p:nvPr/>
+        </p:nvSpPr>
+        <p:spPr>
+          <a:xfrm>
+            <a:off x="777240" y="4901184"/>
+            <a:ext cx="438912" cy="438912"/>
+          </a:xfrm>
+          <a:prstGeom prst="roundRect">
+            <a:avLst>
+              <a:gd name="adj" fmla="val 20833"/>
+            </a:avLst>
+          </a:prstGeom>
+          <a:solidFill>
+            <a:srgbClr val="EEF2FB"/>
+          </a:solidFill>
+          <a:ln/>
+        </p:spPr>
+      </p:sp>
+      <p:sp>
+        <p:nvSpPr>
+          <p:cNvPr id="23" name="Text 21"/>
+          <p:cNvSpPr txBox="1"/>
+          <p:nvPr/>
+        </p:nvSpPr>
+        <p:spPr>
+          <a:xfrm>
+            <a:off x="777240" y="4901184"/>
+            <a:ext cx="438912" cy="438912"/>
+          </a:xfrm>
+          <a:prstGeom prst="rect">
+            <a:avLst/>
+          </a:prstGeom>
+          <a:noFill/>
+          <a:ln/>
+        </p:spPr>
+        <p:txBody>
+          <a:bodyPr wrap="square" lIns="0" tIns="0" rIns="0" bIns="0" rtlCol="0" anchor="ctr"/>
+          <a:lstStyle/>
+          <a:p>
+            <a:pPr algn="ctr" indent="0" marL="0">
+              <a:buNone/>
+            </a:pPr>
+            <a:r>
+              <a:rPr lang="en-US" sz="1300" b="1" dirty="0">
+                <a:solidFill>
+                  <a:srgbClr val="2D63FF"/>
+                </a:solidFill>
+                <a:latin typeface="IBM Plex Mono" pitchFamily="34" charset="0"/>
+                <a:ea typeface="IBM Plex Mono" pitchFamily="34" charset="-122"/>
+                <a:cs typeface="IBM Plex Mono" pitchFamily="34" charset="-120"/>
+              </a:rPr>
+              <a:t>D</a:t>
+            </a:r>
+            <a:endParaRPr lang="en-US" sz="1300" dirty="0"/>
+          </a:p>
+        </p:txBody>
+      </p:sp>
+      <p:sp>
+        <p:nvSpPr>
+          <p:cNvPr id="24" name="Text 22"/>
+          <p:cNvSpPr txBox="1"/>
+          <p:nvPr/>
+        </p:nvSpPr>
+        <p:spPr>
+          <a:xfrm>
+            <a:off x="1417320" y="4754880"/>
+            <a:ext cx="10058400" cy="731520"/>
+          </a:xfrm>
+          <a:prstGeom prst="rect">
+            <a:avLst/>
+          </a:prstGeom>
+          <a:noFill/>
+          <a:ln/>
+        </p:spPr>
+        <p:txBody>
+          <a:bodyPr wrap="square" lIns="0" tIns="0" rIns="0" bIns="0" rtlCol="0" anchor="ctr"/>
+          <a:lstStyle/>
+          <a:p>
+            <a:pPr indent="0" marL="0">
+              <a:lnSpc>
+                <a:spcPct val="115000"/>
+              </a:lnSpc>
+              <a:buNone/>
+            </a:pPr>
+            <a:r>
+              <a:rPr lang="en-US" sz="1700" dirty="0">
+                <a:solidFill>
+                  <a:srgbClr val="101828"/>
+                </a:solidFill>
+                <a:latin typeface="IBM Plex Sans" pitchFamily="34" charset="0"/>
+                <a:ea typeface="IBM Plex Sans" pitchFamily="34" charset="-122"/>
+                <a:cs typeface="IBM Plex Sans" pitchFamily="34" charset="-120"/>
+              </a:rPr>
+              <a:t>SELECT Name FROM Pupils WHERE Year = 10 OR Choir = True;</a:t>
+            </a:r>
+            <a:endParaRPr lang="en-US" sz="1700" dirty="0"/>
           </a:p>
         </p:txBody>
       </p:sp>
@@ -3281,14 +3830,75 @@
       </p:sp>
       <p:sp>
         <p:nvSpPr>
-          <p:cNvPr id="5" name="Text 3"/>
-          <p:cNvSpPr txBox="1"/>
-          <p:nvPr/>
-        </p:nvSpPr>
-        <p:spPr>
-          <a:xfrm>
-            <a:off x="502920" y="411480"/>
-            <a:ext cx="11155680" cy="777240"/>
+          <p:cNvPr id="5" name="Shape 3"/>
+          <p:cNvSpPr/>
+          <p:nvPr/>
+        </p:nvSpPr>
+        <p:spPr>
+          <a:xfrm>
+            <a:off x="502920" y="438912"/>
+            <a:ext cx="3108960" cy="502920"/>
+          </a:xfrm>
+          <a:prstGeom prst="roundRect">
+            <a:avLst>
+              <a:gd name="adj" fmla="val 18182"/>
+            </a:avLst>
+          </a:prstGeom>
+          <a:solidFill>
+            <a:srgbClr val="F4B942"/>
+          </a:solidFill>
+          <a:ln/>
+        </p:spPr>
+      </p:sp>
+      <p:sp>
+        <p:nvSpPr>
+          <p:cNvPr id="6" name="Text 4"/>
+          <p:cNvSpPr txBox="1"/>
+          <p:nvPr/>
+        </p:nvSpPr>
+        <p:spPr>
+          <a:xfrm>
+            <a:off x="502920" y="438912"/>
+            <a:ext cx="3108960" cy="502920"/>
+          </a:xfrm>
+          <a:prstGeom prst="rect">
+            <a:avLst/>
+          </a:prstGeom>
+          <a:noFill/>
+          <a:ln/>
+        </p:spPr>
+        <p:txBody>
+          <a:bodyPr wrap="square" lIns="0" tIns="0" rIns="0" bIns="0" rtlCol="0" anchor="ctr"/>
+          <a:lstStyle/>
+          <a:p>
+            <a:pPr algn="ctr" indent="0" marL="0">
+              <a:buNone/>
+            </a:pPr>
+            <a:r>
+              <a:rPr lang="en-US" sz="1300" b="1" dirty="0">
+                <a:solidFill>
+                  <a:srgbClr val="101828"/>
+                </a:solidFill>
+                <a:latin typeface="IBM Plex Mono" pitchFamily="34" charset="0"/>
+                <a:ea typeface="IBM Plex Mono" pitchFamily="34" charset="-122"/>
+                <a:cs typeface="IBM Plex Mono" pitchFamily="34" charset="-120"/>
+              </a:rPr>
+              <a:t>★  FINAL CHALLENGE</a:t>
+            </a:r>
+            <a:endParaRPr lang="en-US" sz="1300" dirty="0"/>
+          </a:p>
+        </p:txBody>
+      </p:sp>
+      <p:sp>
+        <p:nvSpPr>
+          <p:cNvPr id="7" name="Text 5"/>
+          <p:cNvSpPr txBox="1"/>
+          <p:nvPr/>
+        </p:nvSpPr>
+        <p:spPr>
+          <a:xfrm>
+            <a:off x="502920" y="1097280"/>
+            <a:ext cx="11155680" cy="731520"/>
           </a:xfrm>
           <a:prstGeom prst="rect">
             <a:avLst/>
@@ -3304,7 +3914,7 @@
               <a:buNone/>
             </a:pPr>
             <a:r>
-              <a:rPr lang="en-US" sz="3200" b="1" dirty="0">
+              <a:rPr lang="en-US" sz="3400" b="1" dirty="0">
                 <a:solidFill>
                   <a:srgbClr val="101828"/>
                 </a:solidFill>
@@ -3312,65 +3922,26 @@
                 <a:ea typeface="IBM Plex Sans" pitchFamily="34" charset="-122"/>
                 <a:cs typeface="IBM Plex Sans" pitchFamily="34" charset="-120"/>
               </a:rPr>
-              <a:t>Worth knowing</a:t>
-            </a:r>
-            <a:endParaRPr lang="en-US" sz="3200" dirty="0"/>
-          </a:p>
-        </p:txBody>
-      </p:sp>
-      <p:sp>
-        <p:nvSpPr>
-          <p:cNvPr id="6" name="Text 4"/>
-          <p:cNvSpPr txBox="1"/>
-          <p:nvPr/>
-        </p:nvSpPr>
-        <p:spPr>
-          <a:xfrm>
-            <a:off x="502920" y="1170432"/>
-            <a:ext cx="11155680" cy="411480"/>
-          </a:xfrm>
-          <a:prstGeom prst="rect">
-            <a:avLst/>
-          </a:prstGeom>
-          <a:noFill/>
-          <a:ln/>
-        </p:spPr>
-        <p:txBody>
-          <a:bodyPr wrap="square" lIns="0" tIns="0" rIns="0" bIns="0" rtlCol="0" anchor="ctr"/>
-          <a:lstStyle/>
-          <a:p>
-            <a:pPr indent="0" marL="0">
-              <a:buNone/>
-            </a:pPr>
-            <a:r>
-              <a:rPr lang="en-US" sz="1500" dirty="0">
-                <a:solidFill>
-                  <a:srgbClr val="667085"/>
-                </a:solidFill>
-                <a:latin typeface="IBM Plex Sans" pitchFamily="34" charset="0"/>
-                <a:ea typeface="IBM Plex Sans" pitchFamily="34" charset="-122"/>
-                <a:cs typeface="IBM Plex Sans" pitchFamily="34" charset="-120"/>
-              </a:rPr>
-              <a:t>The information markers dotted around the room</a:t>
-            </a:r>
-            <a:endParaRPr lang="en-US" sz="1500" dirty="0"/>
-          </a:p>
-        </p:txBody>
-      </p:sp>
-      <p:sp>
-        <p:nvSpPr>
-          <p:cNvPr id="7" name="Shape 5"/>
+              <a:t>The lane draw</a:t>
+            </a:r>
+            <a:endParaRPr lang="en-US" sz="3400" dirty="0"/>
+          </a:p>
+        </p:txBody>
+      </p:sp>
+      <p:sp>
+        <p:nvSpPr>
+          <p:cNvPr id="8" name="Shape 6"/>
           <p:cNvSpPr/>
           <p:nvPr/>
         </p:nvSpPr>
         <p:spPr>
           <a:xfrm>
-            <a:off x="502920" y="1828800"/>
-            <a:ext cx="5394960" cy="1737360"/>
+            <a:off x="502920" y="2011680"/>
+            <a:ext cx="11155680" cy="2194560"/>
           </a:xfrm>
           <a:prstGeom prst="roundRect">
             <a:avLst>
-              <a:gd name="adj" fmla="val 6316"/>
+              <a:gd name="adj" fmla="val 5000"/>
             </a:avLst>
           </a:prstGeom>
           <a:solidFill>
@@ -3386,14 +3957,14 @@
       </p:sp>
       <p:sp>
         <p:nvSpPr>
-          <p:cNvPr id="8" name="Text 6"/>
-          <p:cNvSpPr txBox="1"/>
-          <p:nvPr/>
-        </p:nvSpPr>
-        <p:spPr>
-          <a:xfrm>
-            <a:off x="822960" y="2011680"/>
-            <a:ext cx="4754880" cy="365760"/>
+          <p:cNvPr id="9" name="Text 7"/>
+          <p:cNvSpPr txBox="1"/>
+          <p:nvPr/>
+        </p:nvSpPr>
+        <p:spPr>
+          <a:xfrm>
+            <a:off x="1005840" y="2331720"/>
+            <a:ext cx="10149840" cy="1554480"/>
           </a:xfrm>
           <a:prstGeom prst="rect">
             <a:avLst/>
@@ -3406,52 +3977,52 @@
           <a:lstStyle/>
           <a:p>
             <a:pPr indent="0" marL="0">
-              <a:buNone/>
-            </a:pPr>
-            <a:r>
-              <a:rPr lang="en-US" sz="1600" b="1" dirty="0">
-                <a:solidFill>
-                  <a:srgbClr val="2D63FF"/>
+              <a:lnSpc>
+                <a:spcPct val="130000"/>
+              </a:lnSpc>
+              <a:buNone/>
+            </a:pPr>
+            <a:r>
+              <a:rPr lang="en-US" sz="2200" dirty="0">
+                <a:solidFill>
+                  <a:srgbClr val="101828"/>
                 </a:solidFill>
                 <a:latin typeface="IBM Plex Sans" pitchFamily="34" charset="0"/>
                 <a:ea typeface="IBM Plex Sans" pitchFamily="34" charset="-122"/>
                 <a:cs typeface="IBM Plex Sans" pitchFamily="34" charset="-120"/>
               </a:rPr>
-              <a:t>Revision that works</a:t>
-            </a:r>
-            <a:endParaRPr lang="en-US" sz="1600" dirty="0"/>
-          </a:p>
-        </p:txBody>
-      </p:sp>
-      <p:sp>
-        <p:nvSpPr>
-          <p:cNvPr id="9" name="Text 7"/>
-          <p:cNvSpPr txBox="1"/>
-          <p:nvPr/>
-        </p:nvSpPr>
-        <p:spPr>
-          <a:xfrm>
-            <a:off x="822960" y="2395728"/>
-            <a:ext cx="4754880" cy="1005840"/>
-          </a:xfrm>
-          <a:prstGeom prst="rect">
-            <a:avLst/>
-          </a:prstGeom>
-          <a:noFill/>
-          <a:ln/>
-        </p:spPr>
-        <p:txBody>
-          <a:bodyPr wrap="square" lIns="0" tIns="0" rIns="0" bIns="0" rtlCol="0" anchor="t"/>
+              <a:t>Sports day needs a fair draw. Eight runners' names are stored in a file, and the program must give each of them a different lane from 1 to 8, chosen at random, then save the finished list. Tap the star and build it.</a:t>
+            </a:r>
+            <a:endParaRPr lang="en-US" sz="2200" dirty="0"/>
+          </a:p>
+        </p:txBody>
+      </p:sp>
+      <p:sp>
+        <p:nvSpPr>
+          <p:cNvPr id="10" name="Text 8"/>
+          <p:cNvSpPr txBox="1"/>
+          <p:nvPr/>
+        </p:nvSpPr>
+        <p:spPr>
+          <a:xfrm>
+            <a:off x="502920" y="4526280"/>
+            <a:ext cx="11155680" cy="457200"/>
+          </a:xfrm>
+          <a:prstGeom prst="rect">
+            <a:avLst/>
+          </a:prstGeom>
+          <a:noFill/>
+          <a:ln/>
+        </p:spPr>
+        <p:txBody>
+          <a:bodyPr wrap="square" lIns="0" tIns="0" rIns="0" bIns="0" rtlCol="0" anchor="ctr"/>
           <a:lstStyle/>
           <a:p>
             <a:pPr indent="0" marL="0">
-              <a:lnSpc>
-                <a:spcPct val="120000"/>
-              </a:lnSpc>
-              <a:buNone/>
-            </a:pPr>
-            <a:r>
-              <a:rPr lang="en-US" sz="1300" dirty="0">
+              <a:buNone/>
+            </a:pPr>
+            <a:r>
+              <a:rPr lang="en-US" sz="1600" dirty="0">
                 <a:solidFill>
                   <a:srgbClr val="667085"/>
                 </a:solidFill>
@@ -3459,333 +4030,9 @@
                 <a:ea typeface="IBM Plex Sans" pitchFamily="34" charset="-122"/>
                 <a:cs typeface="IBM Plex Sans" pitchFamily="34" charset="-120"/>
               </a:rPr>
-              <a:t>Cover the bullets at a station, say them out loud from memory, then uncover them and check. Reading them again is much easier, and much less useful, than trying to recall them.</a:t>
-            </a:r>
-            <a:endParaRPr lang="en-US" sz="1300" dirty="0"/>
-          </a:p>
-        </p:txBody>
-      </p:sp>
-      <p:sp>
-        <p:nvSpPr>
-          <p:cNvPr id="10" name="Shape 8"/>
-          <p:cNvSpPr/>
-          <p:nvPr/>
-        </p:nvSpPr>
-        <p:spPr>
-          <a:xfrm>
-            <a:off x="6217920" y="1828800"/>
-            <a:ext cx="5394960" cy="1737360"/>
-          </a:xfrm>
-          <a:prstGeom prst="roundRect">
-            <a:avLst>
-              <a:gd name="adj" fmla="val 6316"/>
-            </a:avLst>
-          </a:prstGeom>
-          <a:solidFill>
-            <a:srgbClr val="FFFFFF"/>
-          </a:solidFill>
-          <a:ln w="15875">
-            <a:solidFill>
-              <a:srgbClr val="08A6A6"/>
-            </a:solidFill>
-            <a:prstDash val="solid"/>
-          </a:ln>
-        </p:spPr>
-      </p:sp>
-      <p:sp>
-        <p:nvSpPr>
-          <p:cNvPr id="11" name="Text 9"/>
-          <p:cNvSpPr txBox="1"/>
-          <p:nvPr/>
-        </p:nvSpPr>
-        <p:spPr>
-          <a:xfrm>
-            <a:off x="6537960" y="2011680"/>
-            <a:ext cx="4754880" cy="365760"/>
-          </a:xfrm>
-          <a:prstGeom prst="rect">
-            <a:avLst/>
-          </a:prstGeom>
-          <a:noFill/>
-          <a:ln/>
-        </p:spPr>
-        <p:txBody>
-          <a:bodyPr wrap="square" lIns="0" tIns="0" rIns="0" bIns="0" rtlCol="0" anchor="ctr"/>
-          <a:lstStyle/>
-          <a:p>
-            <a:pPr indent="0" marL="0">
-              <a:buNone/>
-            </a:pPr>
-            <a:r>
-              <a:rPr lang="en-US" sz="1600" b="1" dirty="0">
-                <a:solidFill>
-                  <a:srgbClr val="08A6A6"/>
-                </a:solidFill>
-                <a:latin typeface="IBM Plex Sans" pitchFamily="34" charset="0"/>
-                <a:ea typeface="IBM Plex Sans" pitchFamily="34" charset="-122"/>
-                <a:cs typeface="IBM Plex Sans" pitchFamily="34" charset="-120"/>
-              </a:rPr>
-              <a:t>Two marks, two things</a:t>
+              <a:t>Predict on paper first, then look down and test it.</a:t>
             </a:r>
             <a:endParaRPr lang="en-US" sz="1600" dirty="0"/>
-          </a:p>
-        </p:txBody>
-      </p:sp>
-      <p:sp>
-        <p:nvSpPr>
-          <p:cNvPr id="12" name="Text 10"/>
-          <p:cNvSpPr txBox="1"/>
-          <p:nvPr/>
-        </p:nvSpPr>
-        <p:spPr>
-          <a:xfrm>
-            <a:off x="6537960" y="2395728"/>
-            <a:ext cx="4754880" cy="1005840"/>
-          </a:xfrm>
-          <a:prstGeom prst="rect">
-            <a:avLst/>
-          </a:prstGeom>
-          <a:noFill/>
-          <a:ln/>
-        </p:spPr>
-        <p:txBody>
-          <a:bodyPr wrap="square" lIns="0" tIns="0" rIns="0" bIns="0" rtlCol="0" anchor="t"/>
-          <a:lstStyle/>
-          <a:p>
-            <a:pPr indent="0" marL="0">
-              <a:lnSpc>
-                <a:spcPct val="120000"/>
-              </a:lnSpc>
-              <a:buNone/>
-            </a:pPr>
-            <a:r>
-              <a:rPr lang="en-US" sz="1300" dirty="0">
-                <a:solidFill>
-                  <a:srgbClr val="667085"/>
-                </a:solidFill>
-                <a:latin typeface="IBM Plex Sans" pitchFamily="34" charset="0"/>
-                <a:ea typeface="IBM Plex Sans" pitchFamily="34" charset="-122"/>
-                <a:cs typeface="IBM Plex Sans" pitchFamily="34" charset="-120"/>
-              </a:rPr>
-              <a:t>A two-mark question that says state the difference wants both sides written down. Saying what casting does without saying why it is needed throws away half the marks.</a:t>
-            </a:r>
-            <a:endParaRPr lang="en-US" sz="1300" dirty="0"/>
-          </a:p>
-        </p:txBody>
-      </p:sp>
-      <p:sp>
-        <p:nvSpPr>
-          <p:cNvPr id="13" name="Shape 11"/>
-          <p:cNvSpPr/>
-          <p:nvPr/>
-        </p:nvSpPr>
-        <p:spPr>
-          <a:xfrm>
-            <a:off x="502920" y="3794760"/>
-            <a:ext cx="5394960" cy="1737360"/>
-          </a:xfrm>
-          <a:prstGeom prst="roundRect">
-            <a:avLst>
-              <a:gd name="adj" fmla="val 6316"/>
-            </a:avLst>
-          </a:prstGeom>
-          <a:solidFill>
-            <a:srgbClr val="FFFFFF"/>
-          </a:solidFill>
-          <a:ln w="15875">
-            <a:solidFill>
-              <a:srgbClr val="2D63FF"/>
-            </a:solidFill>
-            <a:prstDash val="solid"/>
-          </a:ln>
-        </p:spPr>
-      </p:sp>
-      <p:sp>
-        <p:nvSpPr>
-          <p:cNvPr id="14" name="Text 12"/>
-          <p:cNvSpPr txBox="1"/>
-          <p:nvPr/>
-        </p:nvSpPr>
-        <p:spPr>
-          <a:xfrm>
-            <a:off x="822960" y="3977640"/>
-            <a:ext cx="4754880" cy="365760"/>
-          </a:xfrm>
-          <a:prstGeom prst="rect">
-            <a:avLst/>
-          </a:prstGeom>
-          <a:noFill/>
-          <a:ln/>
-        </p:spPr>
-        <p:txBody>
-          <a:bodyPr wrap="square" lIns="0" tIns="0" rIns="0" bIns="0" rtlCol="0" anchor="ctr"/>
-          <a:lstStyle/>
-          <a:p>
-            <a:pPr indent="0" marL="0">
-              <a:buNone/>
-            </a:pPr>
-            <a:r>
-              <a:rPr lang="en-US" sz="1600" b="1" dirty="0">
-                <a:solidFill>
-                  <a:srgbClr val="2D63FF"/>
-                </a:solidFill>
-                <a:latin typeface="IBM Plex Sans" pitchFamily="34" charset="0"/>
-                <a:ea typeface="IBM Plex Sans" pitchFamily="34" charset="-122"/>
-                <a:cs typeface="IBM Plex Sans" pitchFamily="34" charset="-120"/>
-              </a:rPr>
-              <a:t>Say which language</a:t>
-            </a:r>
-            <a:endParaRPr lang="en-US" sz="1600" dirty="0"/>
-          </a:p>
-        </p:txBody>
-      </p:sp>
-      <p:sp>
-        <p:nvSpPr>
-          <p:cNvPr id="15" name="Text 13"/>
-          <p:cNvSpPr txBox="1"/>
-          <p:nvPr/>
-        </p:nvSpPr>
-        <p:spPr>
-          <a:xfrm>
-            <a:off x="822960" y="4361688"/>
-            <a:ext cx="4754880" cy="1005840"/>
-          </a:xfrm>
-          <a:prstGeom prst="rect">
-            <a:avLst/>
-          </a:prstGeom>
-          <a:noFill/>
-          <a:ln/>
-        </p:spPr>
-        <p:txBody>
-          <a:bodyPr wrap="square" lIns="0" tIns="0" rIns="0" bIns="0" rtlCol="0" anchor="t"/>
-          <a:lstStyle/>
-          <a:p>
-            <a:pPr indent="0" marL="0">
-              <a:lnSpc>
-                <a:spcPct val="120000"/>
-              </a:lnSpc>
-              <a:buNone/>
-            </a:pPr>
-            <a:r>
-              <a:rPr lang="en-US" sz="1300" dirty="0">
-                <a:solidFill>
-                  <a:srgbClr val="667085"/>
-                </a:solidFill>
-                <a:latin typeface="IBM Plex Sans" pitchFamily="34" charset="0"/>
-                <a:ea typeface="IBM Plex Sans" pitchFamily="34" charset="-122"/>
-                <a:cs typeface="IBM Plex Sans" pitchFamily="34" charset="-120"/>
-              </a:rPr>
-              <a:t>Answering a code question in Python instead of the OCR Exam Reference Language is fine, but stick to one of them for the whole answer. Mixing print() with endif loses marks because neither language is being followed.</a:t>
-            </a:r>
-            <a:endParaRPr lang="en-US" sz="1300" dirty="0"/>
-          </a:p>
-        </p:txBody>
-      </p:sp>
-      <p:sp>
-        <p:nvSpPr>
-          <p:cNvPr id="16" name="Shape 14"/>
-          <p:cNvSpPr/>
-          <p:nvPr/>
-        </p:nvSpPr>
-        <p:spPr>
-          <a:xfrm>
-            <a:off x="6217920" y="3794760"/>
-            <a:ext cx="5394960" cy="1737360"/>
-          </a:xfrm>
-          <a:prstGeom prst="roundRect">
-            <a:avLst>
-              <a:gd name="adj" fmla="val 6316"/>
-            </a:avLst>
-          </a:prstGeom>
-          <a:solidFill>
-            <a:srgbClr val="FFFFFF"/>
-          </a:solidFill>
-          <a:ln w="15875">
-            <a:solidFill>
-              <a:srgbClr val="08A6A6"/>
-            </a:solidFill>
-            <a:prstDash val="solid"/>
-          </a:ln>
-        </p:spPr>
-      </p:sp>
-      <p:sp>
-        <p:nvSpPr>
-          <p:cNvPr id="17" name="Text 15"/>
-          <p:cNvSpPr txBox="1"/>
-          <p:nvPr/>
-        </p:nvSpPr>
-        <p:spPr>
-          <a:xfrm>
-            <a:off x="6537960" y="3977640"/>
-            <a:ext cx="4754880" cy="365760"/>
-          </a:xfrm>
-          <a:prstGeom prst="rect">
-            <a:avLst/>
-          </a:prstGeom>
-          <a:noFill/>
-          <a:ln/>
-        </p:spPr>
-        <p:txBody>
-          <a:bodyPr wrap="square" lIns="0" tIns="0" rIns="0" bIns="0" rtlCol="0" anchor="ctr"/>
-          <a:lstStyle/>
-          <a:p>
-            <a:pPr indent="0" marL="0">
-              <a:buNone/>
-            </a:pPr>
-            <a:r>
-              <a:rPr lang="en-US" sz="1600" b="1" dirty="0">
-                <a:solidFill>
-                  <a:srgbClr val="08A6A6"/>
-                </a:solidFill>
-                <a:latin typeface="IBM Plex Sans" pitchFamily="34" charset="0"/>
-                <a:ea typeface="IBM Plex Sans" pitchFamily="34" charset="-122"/>
-                <a:cs typeface="IBM Plex Sans" pitchFamily="34" charset="-120"/>
-              </a:rPr>
-              <a:t>Three lines, three jobs</a:t>
-            </a:r>
-            <a:endParaRPr lang="en-US" sz="1600" dirty="0"/>
-          </a:p>
-        </p:txBody>
-      </p:sp>
-      <p:sp>
-        <p:nvSpPr>
-          <p:cNvPr id="18" name="Text 16"/>
-          <p:cNvSpPr txBox="1"/>
-          <p:nvPr/>
-        </p:nvSpPr>
-        <p:spPr>
-          <a:xfrm>
-            <a:off x="6537960" y="4361688"/>
-            <a:ext cx="4754880" cy="1005840"/>
-          </a:xfrm>
-          <a:prstGeom prst="rect">
-            <a:avLst/>
-          </a:prstGeom>
-          <a:noFill/>
-          <a:ln/>
-        </p:spPr>
-        <p:txBody>
-          <a:bodyPr wrap="square" lIns="0" tIns="0" rIns="0" bIns="0" rtlCol="0" anchor="t"/>
-          <a:lstStyle/>
-          <a:p>
-            <a:pPr indent="0" marL="0">
-              <a:lnSpc>
-                <a:spcPct val="120000"/>
-              </a:lnSpc>
-              <a:buNone/>
-            </a:pPr>
-            <a:r>
-              <a:rPr lang="en-US" sz="1300" dirty="0">
-                <a:solidFill>
-                  <a:srgbClr val="667085"/>
-                </a:solidFill>
-                <a:latin typeface="IBM Plex Sans" pitchFamily="34" charset="0"/>
-                <a:ea typeface="IBM Plex Sans" pitchFamily="34" charset="-122"/>
-                <a:cs typeface="IBM Plex Sans" pitchFamily="34" charset="-120"/>
-              </a:rPr>
-              <a:t>Nearly every SQL mark comes from the same three lines: SELECT for the fields, FROM for the table and WHERE for the records. Write them on separate lines and check each one in turn.</a:t>
-            </a:r>
-            <a:endParaRPr lang="en-US" sz="1300" dirty="0"/>
           </a:p>
         </p:txBody>
       </p:sp>
@@ -3952,7 +4199,7 @@
                 <a:ea typeface="IBM Plex Sans" pitchFamily="34" charset="-122"/>
                 <a:cs typeface="IBM Plex Sans" pitchFamily="34" charset="-120"/>
               </a:rPr>
-              <a:t>Exam practice</a:t>
+              <a:t>Worth knowing</a:t>
             </a:r>
             <a:endParaRPr lang="en-US" sz="3200" dirty="0"/>
           </a:p>
@@ -3991,7 +4238,7 @@
                 <a:ea typeface="IBM Plex Sans" pitchFamily="34" charset="-122"/>
                 <a:cs typeface="IBM Plex Sans" pitchFamily="34" charset="-120"/>
               </a:rPr>
-              <a:t>Devices away. Answer from memory on the worksheet.</a:t>
+              <a:t>The information markers dotted around the room</a:t>
             </a:r>
             <a:endParaRPr lang="en-US" sz="1500" dirty="0"/>
           </a:p>
@@ -4006,11 +4253,11 @@
         <p:spPr>
           <a:xfrm>
             <a:off x="502920" y="1828800"/>
-            <a:ext cx="11155680" cy="1097280"/>
+            <a:ext cx="5394960" cy="1737360"/>
           </a:xfrm>
           <a:prstGeom prst="roundRect">
             <a:avLst>
-              <a:gd name="adj" fmla="val 10000"/>
+              <a:gd name="adj" fmla="val 6316"/>
             </a:avLst>
           </a:prstGeom>
           <a:solidFill>
@@ -4018,7 +4265,7 @@
           </a:solidFill>
           <a:ln w="15875">
             <a:solidFill>
-              <a:srgbClr val="D9DEE7"/>
+              <a:srgbClr val="2D63FF"/>
             </a:solidFill>
             <a:prstDash val="solid"/>
           </a:ln>
@@ -4032,8 +4279,8 @@
         </p:nvSpPr>
         <p:spPr>
           <a:xfrm>
-            <a:off x="914400" y="1938528"/>
-            <a:ext cx="9418320" cy="877824"/>
+            <a:off x="822960" y="2011680"/>
+            <a:ext cx="4754880" cy="365760"/>
           </a:xfrm>
           <a:prstGeom prst="rect">
             <a:avLst/>
@@ -4046,101 +4293,79 @@
           <a:lstStyle/>
           <a:p>
             <a:pPr indent="0" marL="0">
-              <a:lnSpc>
-                <a:spcPct val="118000"/>
-              </a:lnSpc>
-              <a:buNone/>
-            </a:pPr>
-            <a:r>
-              <a:rPr lang="en-US" sz="1700" dirty="0">
-                <a:solidFill>
-                  <a:srgbClr val="101828"/>
+              <a:buNone/>
+            </a:pPr>
+            <a:r>
+              <a:rPr lang="en-US" sz="1600" b="1" dirty="0">
+                <a:solidFill>
+                  <a:srgbClr val="2D63FF"/>
                 </a:solidFill>
                 <a:latin typeface="IBM Plex Sans" pitchFamily="34" charset="0"/>
                 <a:ea typeface="IBM Plex Sans" pitchFamily="34" charset="-122"/>
                 <a:cs typeface="IBM Plex Sans" pitchFamily="34" charset="-120"/>
               </a:rPr>
-              <a:t>State the difference between a count-controlled loop and a condition-controlled loop.</a:t>
-            </a:r>
-            <a:endParaRPr lang="en-US" sz="1700" dirty="0"/>
-          </a:p>
-        </p:txBody>
-      </p:sp>
-      <p:sp>
-        <p:nvSpPr>
-          <p:cNvPr id="9" name="Shape 7"/>
+              <a:t>Revision that works</a:t>
+            </a:r>
+            <a:endParaRPr lang="en-US" sz="1600" dirty="0"/>
+          </a:p>
+        </p:txBody>
+      </p:sp>
+      <p:sp>
+        <p:nvSpPr>
+          <p:cNvPr id="9" name="Text 7"/>
+          <p:cNvSpPr txBox="1"/>
+          <p:nvPr/>
+        </p:nvSpPr>
+        <p:spPr>
+          <a:xfrm>
+            <a:off x="822960" y="2395728"/>
+            <a:ext cx="4754880" cy="1005840"/>
+          </a:xfrm>
+          <a:prstGeom prst="rect">
+            <a:avLst/>
+          </a:prstGeom>
+          <a:noFill/>
+          <a:ln/>
+        </p:spPr>
+        <p:txBody>
+          <a:bodyPr wrap="square" lIns="0" tIns="0" rIns="0" bIns="0" rtlCol="0" anchor="t"/>
+          <a:lstStyle/>
+          <a:p>
+            <a:pPr indent="0" marL="0">
+              <a:lnSpc>
+                <a:spcPct val="120000"/>
+              </a:lnSpc>
+              <a:buNone/>
+            </a:pPr>
+            <a:r>
+              <a:rPr lang="en-US" sz="1300" dirty="0">
+                <a:solidFill>
+                  <a:srgbClr val="667085"/>
+                </a:solidFill>
+                <a:latin typeface="IBM Plex Sans" pitchFamily="34" charset="0"/>
+                <a:ea typeface="IBM Plex Sans" pitchFamily="34" charset="-122"/>
+                <a:cs typeface="IBM Plex Sans" pitchFamily="34" charset="-120"/>
+              </a:rPr>
+              <a:t>Cover the bullets at a station, say them out loud from memory, then uncover them and check. Reading them again is much easier, and much less useful, than trying to recall them.</a:t>
+            </a:r>
+            <a:endParaRPr lang="en-US" sz="1300" dirty="0"/>
+          </a:p>
+        </p:txBody>
+      </p:sp>
+      <p:sp>
+        <p:nvSpPr>
+          <p:cNvPr id="10" name="Shape 8"/>
           <p:cNvSpPr/>
           <p:nvPr/>
         </p:nvSpPr>
         <p:spPr>
           <a:xfrm>
-            <a:off x="10515600" y="2130552"/>
-            <a:ext cx="868680" cy="493776"/>
+            <a:off x="6217920" y="1828800"/>
+            <a:ext cx="5394960" cy="1737360"/>
           </a:xfrm>
           <a:prstGeom prst="roundRect">
             <a:avLst>
-              <a:gd name="adj" fmla="val 18519"/>
-            </a:avLst>
-          </a:prstGeom>
-          <a:solidFill>
-            <a:srgbClr val="EEF2FB"/>
-          </a:solidFill>
-          <a:ln/>
-        </p:spPr>
-      </p:sp>
-      <p:sp>
-        <p:nvSpPr>
-          <p:cNvPr id="10" name="Text 8"/>
-          <p:cNvSpPr txBox="1"/>
-          <p:nvPr/>
-        </p:nvSpPr>
-        <p:spPr>
-          <a:xfrm>
-            <a:off x="10515600" y="2130552"/>
-            <a:ext cx="868680" cy="493776"/>
-          </a:xfrm>
-          <a:prstGeom prst="rect">
-            <a:avLst/>
-          </a:prstGeom>
-          <a:noFill/>
-          <a:ln/>
-        </p:spPr>
-        <p:txBody>
-          <a:bodyPr wrap="square" lIns="0" tIns="0" rIns="0" bIns="0" rtlCol="0" anchor="ctr"/>
-          <a:lstStyle/>
-          <a:p>
-            <a:pPr algn="ctr" indent="0" marL="0">
-              <a:buNone/>
-            </a:pPr>
-            <a:r>
-              <a:rPr lang="en-US" sz="1500" b="1" dirty="0">
-                <a:solidFill>
-                  <a:srgbClr val="2D63FF"/>
-                </a:solidFill>
-                <a:latin typeface="IBM Plex Mono" pitchFamily="34" charset="0"/>
-                <a:ea typeface="IBM Plex Mono" pitchFamily="34" charset="-122"/>
-                <a:cs typeface="IBM Plex Mono" pitchFamily="34" charset="-120"/>
-              </a:rPr>
-              <a:t>[2]</a:t>
-            </a:r>
-            <a:endParaRPr lang="en-US" sz="1500" dirty="0"/>
-          </a:p>
-        </p:txBody>
-      </p:sp>
-      <p:sp>
-        <p:nvSpPr>
-          <p:cNvPr id="11" name="Shape 9"/>
-          <p:cNvSpPr/>
-          <p:nvPr/>
-        </p:nvSpPr>
-        <p:spPr>
-          <a:xfrm>
-            <a:off x="502920" y="3127248"/>
-            <a:ext cx="11155680" cy="1097280"/>
-          </a:xfrm>
-          <a:prstGeom prst="roundRect">
-            <a:avLst>
-              <a:gd name="adj" fmla="val 10000"/>
+              <a:gd name="adj" fmla="val 6316"/>
             </a:avLst>
           </a:prstGeom>
           <a:solidFill>
@@ -4148,7 +4373,7 @@
           </a:solidFill>
           <a:ln w="15875">
             <a:solidFill>
-              <a:srgbClr val="D9DEE7"/>
+              <a:srgbClr val="08A6A6"/>
             </a:solidFill>
             <a:prstDash val="solid"/>
           </a:ln>
@@ -4156,14 +4381,14 @@
       </p:sp>
       <p:sp>
         <p:nvSpPr>
-          <p:cNvPr id="12" name="Text 10"/>
-          <p:cNvSpPr txBox="1"/>
-          <p:nvPr/>
-        </p:nvSpPr>
-        <p:spPr>
-          <a:xfrm>
-            <a:off x="914400" y="3236976"/>
-            <a:ext cx="9418320" cy="877824"/>
+          <p:cNvPr id="11" name="Text 9"/>
+          <p:cNvSpPr txBox="1"/>
+          <p:nvPr/>
+        </p:nvSpPr>
+        <p:spPr>
+          <a:xfrm>
+            <a:off x="6537960" y="2011680"/>
+            <a:ext cx="4754880" cy="365760"/>
           </a:xfrm>
           <a:prstGeom prst="rect">
             <a:avLst/>
@@ -4176,23 +4401,62 @@
           <a:lstStyle/>
           <a:p>
             <a:pPr indent="0" marL="0">
-              <a:lnSpc>
-                <a:spcPct val="118000"/>
-              </a:lnSpc>
-              <a:buNone/>
-            </a:pPr>
-            <a:r>
-              <a:rPr lang="en-US" sz="1700" dirty="0">
-                <a:solidFill>
-                  <a:srgbClr val="101828"/>
+              <a:buNone/>
+            </a:pPr>
+            <a:r>
+              <a:rPr lang="en-US" sz="1600" b="1" dirty="0">
+                <a:solidFill>
+                  <a:srgbClr val="08A6A6"/>
                 </a:solidFill>
                 <a:latin typeface="IBM Plex Sans" pitchFamily="34" charset="0"/>
                 <a:ea typeface="IBM Plex Sans" pitchFamily="34" charset="-122"/>
                 <a:cs typeface="IBM Plex Sans" pitchFamily="34" charset="-120"/>
               </a:rPr>
-              <a:t>A club stores its members in a table called Members, with the fields MemberID, Name, Year and Paid. Write an SQL query that returns the name of every member in Year 10 who has not paid.</a:t>
-            </a:r>
-            <a:endParaRPr lang="en-US" sz="1700" dirty="0"/>
+              <a:t>Two marks, two things</a:t>
+            </a:r>
+            <a:endParaRPr lang="en-US" sz="1600" dirty="0"/>
+          </a:p>
+        </p:txBody>
+      </p:sp>
+      <p:sp>
+        <p:nvSpPr>
+          <p:cNvPr id="12" name="Text 10"/>
+          <p:cNvSpPr txBox="1"/>
+          <p:nvPr/>
+        </p:nvSpPr>
+        <p:spPr>
+          <a:xfrm>
+            <a:off x="6537960" y="2395728"/>
+            <a:ext cx="4754880" cy="1005840"/>
+          </a:xfrm>
+          <a:prstGeom prst="rect">
+            <a:avLst/>
+          </a:prstGeom>
+          <a:noFill/>
+          <a:ln/>
+        </p:spPr>
+        <p:txBody>
+          <a:bodyPr wrap="square" lIns="0" tIns="0" rIns="0" bIns="0" rtlCol="0" anchor="t"/>
+          <a:lstStyle/>
+          <a:p>
+            <a:pPr indent="0" marL="0">
+              <a:lnSpc>
+                <a:spcPct val="120000"/>
+              </a:lnSpc>
+              <a:buNone/>
+            </a:pPr>
+            <a:r>
+              <a:rPr lang="en-US" sz="1300" dirty="0">
+                <a:solidFill>
+                  <a:srgbClr val="667085"/>
+                </a:solidFill>
+                <a:latin typeface="IBM Plex Sans" pitchFamily="34" charset="0"/>
+                <a:ea typeface="IBM Plex Sans" pitchFamily="34" charset="-122"/>
+                <a:cs typeface="IBM Plex Sans" pitchFamily="34" charset="-120"/>
+              </a:rPr>
+              <a:t>A two-mark question that says state the difference wants both sides written down. Saying what casting does without saying why it is needed throws away half the marks.</a:t>
+            </a:r>
+            <a:endParaRPr lang="en-US" sz="1300" dirty="0"/>
           </a:p>
         </p:txBody>
       </p:sp>
@@ -4204,73 +4468,12 @@
         </p:nvSpPr>
         <p:spPr>
           <a:xfrm>
-            <a:off x="10515600" y="3429000"/>
-            <a:ext cx="868680" cy="493776"/>
+            <a:off x="502920" y="3794760"/>
+            <a:ext cx="5394960" cy="1737360"/>
           </a:xfrm>
           <a:prstGeom prst="roundRect">
             <a:avLst>
-              <a:gd name="adj" fmla="val 18519"/>
-            </a:avLst>
-          </a:prstGeom>
-          <a:solidFill>
-            <a:srgbClr val="EEF2FB"/>
-          </a:solidFill>
-          <a:ln/>
-        </p:spPr>
-      </p:sp>
-      <p:sp>
-        <p:nvSpPr>
-          <p:cNvPr id="14" name="Text 12"/>
-          <p:cNvSpPr txBox="1"/>
-          <p:nvPr/>
-        </p:nvSpPr>
-        <p:spPr>
-          <a:xfrm>
-            <a:off x="10515600" y="3429000"/>
-            <a:ext cx="868680" cy="493776"/>
-          </a:xfrm>
-          <a:prstGeom prst="rect">
-            <a:avLst/>
-          </a:prstGeom>
-          <a:noFill/>
-          <a:ln/>
-        </p:spPr>
-        <p:txBody>
-          <a:bodyPr wrap="square" lIns="0" tIns="0" rIns="0" bIns="0" rtlCol="0" anchor="ctr"/>
-          <a:lstStyle/>
-          <a:p>
-            <a:pPr algn="ctr" indent="0" marL="0">
-              <a:buNone/>
-            </a:pPr>
-            <a:r>
-              <a:rPr lang="en-US" sz="1500" b="1" dirty="0">
-                <a:solidFill>
-                  <a:srgbClr val="2D63FF"/>
-                </a:solidFill>
-                <a:latin typeface="IBM Plex Mono" pitchFamily="34" charset="0"/>
-                <a:ea typeface="IBM Plex Mono" pitchFamily="34" charset="-122"/>
-                <a:cs typeface="IBM Plex Mono" pitchFamily="34" charset="-120"/>
-              </a:rPr>
-              <a:t>[3]</a:t>
-            </a:r>
-            <a:endParaRPr lang="en-US" sz="1500" dirty="0"/>
-          </a:p>
-        </p:txBody>
-      </p:sp>
-      <p:sp>
-        <p:nvSpPr>
-          <p:cNvPr id="15" name="Shape 13"/>
-          <p:cNvSpPr/>
-          <p:nvPr/>
-        </p:nvSpPr>
-        <p:spPr>
-          <a:xfrm>
-            <a:off x="502920" y="4425696"/>
-            <a:ext cx="11155680" cy="1097280"/>
-          </a:xfrm>
-          <a:prstGeom prst="roundRect">
-            <a:avLst>
-              <a:gd name="adj" fmla="val 10000"/>
+              <a:gd name="adj" fmla="val 6316"/>
             </a:avLst>
           </a:prstGeom>
           <a:solidFill>
@@ -4278,7 +4481,7 @@
           </a:solidFill>
           <a:ln w="15875">
             <a:solidFill>
-              <a:srgbClr val="D9DEE7"/>
+              <a:srgbClr val="2D63FF"/>
             </a:solidFill>
             <a:prstDash val="solid"/>
           </a:ln>
@@ -4286,14 +4489,14 @@
       </p:sp>
       <p:sp>
         <p:nvSpPr>
-          <p:cNvPr id="16" name="Text 14"/>
-          <p:cNvSpPr txBox="1"/>
-          <p:nvPr/>
-        </p:nvSpPr>
-        <p:spPr>
-          <a:xfrm>
-            <a:off x="914400" y="4535424"/>
-            <a:ext cx="9418320" cy="877824"/>
+          <p:cNvPr id="14" name="Text 12"/>
+          <p:cNvSpPr txBox="1"/>
+          <p:nvPr/>
+        </p:nvSpPr>
+        <p:spPr>
+          <a:xfrm>
+            <a:off x="822960" y="3977640"/>
+            <a:ext cx="4754880" cy="365760"/>
           </a:xfrm>
           <a:prstGeom prst="rect">
             <a:avLst/>
@@ -4306,47 +4509,130 @@
           <a:lstStyle/>
           <a:p>
             <a:pPr indent="0" marL="0">
-              <a:lnSpc>
-                <a:spcPct val="118000"/>
-              </a:lnSpc>
-              <a:buNone/>
-            </a:pPr>
-            <a:r>
-              <a:rPr lang="en-US" sz="1700" dirty="0">
-                <a:solidFill>
-                  <a:srgbClr val="101828"/>
+              <a:buNone/>
+            </a:pPr>
+            <a:r>
+              <a:rPr lang="en-US" sz="1600" b="1" dirty="0">
+                <a:solidFill>
+                  <a:srgbClr val="2D63FF"/>
                 </a:solidFill>
                 <a:latin typeface="IBM Plex Sans" pitchFamily="34" charset="0"/>
                 <a:ea typeface="IBM Plex Sans" pitchFamily="34" charset="-122"/>
                 <a:cs typeface="IBM Plex Sans" pitchFamily="34" charset="-120"/>
               </a:rPr>
-              <a:t>Eight runners' names are stored in a file. Write an algorithm that gives each runner a different lane from 1 to 8, chosen at random, and outputs the finished draw. Use the OCR Exam Reference Language or a language you know.</a:t>
-            </a:r>
-            <a:endParaRPr lang="en-US" sz="1700" dirty="0"/>
-          </a:p>
-        </p:txBody>
-      </p:sp>
-      <p:sp>
-        <p:nvSpPr>
-          <p:cNvPr id="17" name="Shape 15"/>
+              <a:t>Say which language</a:t>
+            </a:r>
+            <a:endParaRPr lang="en-US" sz="1600" dirty="0"/>
+          </a:p>
+        </p:txBody>
+      </p:sp>
+      <p:sp>
+        <p:nvSpPr>
+          <p:cNvPr id="15" name="Text 13"/>
+          <p:cNvSpPr txBox="1"/>
+          <p:nvPr/>
+        </p:nvSpPr>
+        <p:spPr>
+          <a:xfrm>
+            <a:off x="822960" y="4361688"/>
+            <a:ext cx="4754880" cy="1005840"/>
+          </a:xfrm>
+          <a:prstGeom prst="rect">
+            <a:avLst/>
+          </a:prstGeom>
+          <a:noFill/>
+          <a:ln/>
+        </p:spPr>
+        <p:txBody>
+          <a:bodyPr wrap="square" lIns="0" tIns="0" rIns="0" bIns="0" rtlCol="0" anchor="t"/>
+          <a:lstStyle/>
+          <a:p>
+            <a:pPr indent="0" marL="0">
+              <a:lnSpc>
+                <a:spcPct val="120000"/>
+              </a:lnSpc>
+              <a:buNone/>
+            </a:pPr>
+            <a:r>
+              <a:rPr lang="en-US" sz="1300" dirty="0">
+                <a:solidFill>
+                  <a:srgbClr val="667085"/>
+                </a:solidFill>
+                <a:latin typeface="IBM Plex Sans" pitchFamily="34" charset="0"/>
+                <a:ea typeface="IBM Plex Sans" pitchFamily="34" charset="-122"/>
+                <a:cs typeface="IBM Plex Sans" pitchFamily="34" charset="-120"/>
+              </a:rPr>
+              <a:t>Answering a code question in Python instead of the OCR Exam Reference Language is fine, but stick to one of them for the whole answer. Mixing print() with endif loses marks because neither language is being followed.</a:t>
+            </a:r>
+            <a:endParaRPr lang="en-US" sz="1300" dirty="0"/>
+          </a:p>
+        </p:txBody>
+      </p:sp>
+      <p:sp>
+        <p:nvSpPr>
+          <p:cNvPr id="16" name="Shape 14"/>
           <p:cNvSpPr/>
           <p:nvPr/>
         </p:nvSpPr>
         <p:spPr>
           <a:xfrm>
-            <a:off x="10515600" y="4727448"/>
-            <a:ext cx="868680" cy="493776"/>
+            <a:off x="6217920" y="3794760"/>
+            <a:ext cx="5394960" cy="1737360"/>
           </a:xfrm>
           <a:prstGeom prst="roundRect">
             <a:avLst>
-              <a:gd name="adj" fmla="val 18519"/>
+              <a:gd name="adj" fmla="val 6316"/>
             </a:avLst>
           </a:prstGeom>
           <a:solidFill>
-            <a:srgbClr val="EEF2FB"/>
+            <a:srgbClr val="FFFFFF"/>
           </a:solidFill>
-          <a:ln/>
-        </p:spPr>
+          <a:ln w="15875">
+            <a:solidFill>
+              <a:srgbClr val="08A6A6"/>
+            </a:solidFill>
+            <a:prstDash val="solid"/>
+          </a:ln>
+        </p:spPr>
+      </p:sp>
+      <p:sp>
+        <p:nvSpPr>
+          <p:cNvPr id="17" name="Text 15"/>
+          <p:cNvSpPr txBox="1"/>
+          <p:nvPr/>
+        </p:nvSpPr>
+        <p:spPr>
+          <a:xfrm>
+            <a:off x="6537960" y="3977640"/>
+            <a:ext cx="4754880" cy="365760"/>
+          </a:xfrm>
+          <a:prstGeom prst="rect">
+            <a:avLst/>
+          </a:prstGeom>
+          <a:noFill/>
+          <a:ln/>
+        </p:spPr>
+        <p:txBody>
+          <a:bodyPr wrap="square" lIns="0" tIns="0" rIns="0" bIns="0" rtlCol="0" anchor="ctr"/>
+          <a:lstStyle/>
+          <a:p>
+            <a:pPr indent="0" marL="0">
+              <a:buNone/>
+            </a:pPr>
+            <a:r>
+              <a:rPr lang="en-US" sz="1600" b="1" dirty="0">
+                <a:solidFill>
+                  <a:srgbClr val="08A6A6"/>
+                </a:solidFill>
+                <a:latin typeface="IBM Plex Sans" pitchFamily="34" charset="0"/>
+                <a:ea typeface="IBM Plex Sans" pitchFamily="34" charset="-122"/>
+                <a:cs typeface="IBM Plex Sans" pitchFamily="34" charset="-120"/>
+              </a:rPr>
+              <a:t>Three lines, three jobs</a:t>
+            </a:r>
+            <a:endParaRPr lang="en-US" sz="1600" dirty="0"/>
+          </a:p>
+        </p:txBody>
       </p:sp>
       <p:sp>
         <p:nvSpPr>
@@ -4356,34 +4642,37 @@
         </p:nvSpPr>
         <p:spPr>
           <a:xfrm>
-            <a:off x="10515600" y="4727448"/>
-            <a:ext cx="868680" cy="493776"/>
-          </a:xfrm>
-          <a:prstGeom prst="rect">
-            <a:avLst/>
-          </a:prstGeom>
-          <a:noFill/>
-          <a:ln/>
-        </p:spPr>
-        <p:txBody>
-          <a:bodyPr wrap="square" lIns="0" tIns="0" rIns="0" bIns="0" rtlCol="0" anchor="ctr"/>
-          <a:lstStyle/>
-          <a:p>
-            <a:pPr algn="ctr" indent="0" marL="0">
-              <a:buNone/>
-            </a:pPr>
-            <a:r>
-              <a:rPr lang="en-US" sz="1500" b="1" dirty="0">
-                <a:solidFill>
-                  <a:srgbClr val="2D63FF"/>
-                </a:solidFill>
-                <a:latin typeface="IBM Plex Mono" pitchFamily="34" charset="0"/>
-                <a:ea typeface="IBM Plex Mono" pitchFamily="34" charset="-122"/>
-                <a:cs typeface="IBM Plex Mono" pitchFamily="34" charset="-120"/>
-              </a:rPr>
-              <a:t>[6]</a:t>
-            </a:r>
-            <a:endParaRPr lang="en-US" sz="1500" dirty="0"/>
+            <a:off x="6537960" y="4361688"/>
+            <a:ext cx="4754880" cy="1005840"/>
+          </a:xfrm>
+          <a:prstGeom prst="rect">
+            <a:avLst/>
+          </a:prstGeom>
+          <a:noFill/>
+          <a:ln/>
+        </p:spPr>
+        <p:txBody>
+          <a:bodyPr wrap="square" lIns="0" tIns="0" rIns="0" bIns="0" rtlCol="0" anchor="t"/>
+          <a:lstStyle/>
+          <a:p>
+            <a:pPr indent="0" marL="0">
+              <a:lnSpc>
+                <a:spcPct val="120000"/>
+              </a:lnSpc>
+              <a:buNone/>
+            </a:pPr>
+            <a:r>
+              <a:rPr lang="en-US" sz="1300" dirty="0">
+                <a:solidFill>
+                  <a:srgbClr val="667085"/>
+                </a:solidFill>
+                <a:latin typeface="IBM Plex Sans" pitchFamily="34" charset="0"/>
+                <a:ea typeface="IBM Plex Sans" pitchFamily="34" charset="-122"/>
+                <a:cs typeface="IBM Plex Sans" pitchFamily="34" charset="-120"/>
+              </a:rPr>
+              <a:t>Nearly every SQL mark comes from the same three lines: SELECT for the fields, FROM for the table and WHERE for the records. Write them on separate lines and check each one in turn.</a:t>
+            </a:r>
+            <a:endParaRPr lang="en-US" sz="1300" dirty="0"/>
           </a:p>
         </p:txBody>
       </p:sp>
@@ -4398,6 +4687,604 @@
 <file path=ppt/slides/slide14.xml><?xml version="1.0" encoding="utf-8"?>
 <p:sld xmlns:a="http://schemas.openxmlformats.org/drawingml/2006/main" xmlns:r="http://schemas.openxmlformats.org/officeDocument/2006/relationships" xmlns:p="http://schemas.openxmlformats.org/presentationml/2006/main">
   <p:cSld name="Slide 14">
+    <p:bg>
+      <p:bgPr>
+        <a:solidFill>
+          <a:srgbClr val="F7F7F4"/>
+        </a:solidFill>
+      </p:bgPr>
+    </p:bg>
+    <p:spTree>
+      <p:nvGrpSpPr>
+        <p:cNvPr id="1" name=""/>
+        <p:cNvGrpSpPr/>
+        <p:nvPr/>
+      </p:nvGrpSpPr>
+      <p:grpSpPr>
+        <a:xfrm>
+          <a:off x="0" y="0"/>
+          <a:ext cx="0" cy="0"/>
+          <a:chOff x="0" y="0"/>
+          <a:chExt cx="0" cy="0"/>
+        </a:xfrm>
+      </p:grpSpPr>
+      <p:sp>
+        <p:nvSpPr>
+          <p:cNvPr id="2" name="Shape 0"/>
+          <p:cNvSpPr/>
+          <p:nvPr/>
+        </p:nvSpPr>
+        <p:spPr>
+          <a:xfrm>
+            <a:off x="0" y="0"/>
+            <a:ext cx="12188952" cy="82296"/>
+          </a:xfrm>
+          <a:prstGeom prst="rect">
+            <a:avLst/>
+          </a:prstGeom>
+          <a:solidFill>
+            <a:srgbClr val="2D63FF"/>
+          </a:solidFill>
+          <a:ln/>
+        </p:spPr>
+      </p:sp>
+      <p:sp>
+        <p:nvSpPr>
+          <p:cNvPr id="3" name="Text 1"/>
+          <p:cNvSpPr txBox="1"/>
+          <p:nvPr/>
+        </p:nvSpPr>
+        <p:spPr>
+          <a:xfrm>
+            <a:off x="502920" y="6236208"/>
+            <a:ext cx="7772400" cy="365760"/>
+          </a:xfrm>
+          <a:prstGeom prst="rect">
+            <a:avLst/>
+          </a:prstGeom>
+          <a:noFill/>
+          <a:ln/>
+        </p:spPr>
+        <p:txBody>
+          <a:bodyPr wrap="square" lIns="0" tIns="0" rIns="0" bIns="0" rtlCol="0" anchor="ctr"/>
+          <a:lstStyle/>
+          <a:p>
+            <a:pPr indent="0" marL="0">
+              <a:buNone/>
+            </a:pPr>
+            <a:r>
+              <a:rPr lang="en-US" sz="1100" dirty="0">
+                <a:solidFill>
+                  <a:srgbClr val="667085"/>
+                </a:solidFill>
+                <a:latin typeface="IBM Plex Mono" pitchFamily="34" charset="0"/>
+                <a:ea typeface="IBM Plex Mono" pitchFamily="34" charset="-122"/>
+                <a:cs typeface="IBM Plex Mono" pitchFamily="34" charset="-120"/>
+              </a:rPr>
+              <a:t>2.2 Programming fundamentals  |  Lesson 7</a:t>
+            </a:r>
+            <a:endParaRPr lang="en-US" sz="1100" dirty="0"/>
+          </a:p>
+        </p:txBody>
+      </p:sp>
+      <p:sp>
+        <p:nvSpPr>
+          <p:cNvPr id="4" name="Text 2"/>
+          <p:cNvSpPr txBox="1"/>
+          <p:nvPr/>
+        </p:nvSpPr>
+        <p:spPr>
+          <a:xfrm>
+            <a:off x="9326880" y="6236208"/>
+            <a:ext cx="2377440" cy="365760"/>
+          </a:xfrm>
+          <a:prstGeom prst="rect">
+            <a:avLst/>
+          </a:prstGeom>
+          <a:noFill/>
+          <a:ln/>
+        </p:spPr>
+        <p:txBody>
+          <a:bodyPr wrap="square" lIns="0" tIns="0" rIns="0" bIns="0" rtlCol="0" anchor="ctr"/>
+          <a:lstStyle/>
+          <a:p>
+            <a:pPr algn="r" indent="0" marL="0">
+              <a:buNone/>
+            </a:pPr>
+            <a:r>
+              <a:rPr lang="en-US" sz="1100" dirty="0">
+                <a:solidFill>
+                  <a:srgbClr val="667085"/>
+                </a:solidFill>
+                <a:latin typeface="IBM Plex Mono" pitchFamily="34" charset="0"/>
+                <a:ea typeface="IBM Plex Mono" pitchFamily="34" charset="-122"/>
+                <a:cs typeface="IBM Plex Mono" pitchFamily="34" charset="-120"/>
+              </a:rPr>
+              <a:t>Revise 360</a:t>
+            </a:r>
+            <a:endParaRPr lang="en-US" sz="1100" dirty="0"/>
+          </a:p>
+        </p:txBody>
+      </p:sp>
+      <p:sp>
+        <p:nvSpPr>
+          <p:cNvPr id="5" name="Text 3"/>
+          <p:cNvSpPr txBox="1"/>
+          <p:nvPr/>
+        </p:nvSpPr>
+        <p:spPr>
+          <a:xfrm>
+            <a:off x="502920" y="411480"/>
+            <a:ext cx="11155680" cy="777240"/>
+          </a:xfrm>
+          <a:prstGeom prst="rect">
+            <a:avLst/>
+          </a:prstGeom>
+          <a:noFill/>
+          <a:ln/>
+        </p:spPr>
+        <p:txBody>
+          <a:bodyPr wrap="square" lIns="0" tIns="0" rIns="0" bIns="0" rtlCol="0" anchor="ctr"/>
+          <a:lstStyle/>
+          <a:p>
+            <a:pPr indent="0" marL="0">
+              <a:buNone/>
+            </a:pPr>
+            <a:r>
+              <a:rPr lang="en-US" sz="3200" b="1" dirty="0">
+                <a:solidFill>
+                  <a:srgbClr val="101828"/>
+                </a:solidFill>
+                <a:latin typeface="IBM Plex Sans" pitchFamily="34" charset="0"/>
+                <a:ea typeface="IBM Plex Sans" pitchFamily="34" charset="-122"/>
+                <a:cs typeface="IBM Plex Sans" pitchFamily="34" charset="-120"/>
+              </a:rPr>
+              <a:t>Exam practice</a:t>
+            </a:r>
+            <a:endParaRPr lang="en-US" sz="3200" dirty="0"/>
+          </a:p>
+        </p:txBody>
+      </p:sp>
+      <p:sp>
+        <p:nvSpPr>
+          <p:cNvPr id="6" name="Text 4"/>
+          <p:cNvSpPr txBox="1"/>
+          <p:nvPr/>
+        </p:nvSpPr>
+        <p:spPr>
+          <a:xfrm>
+            <a:off x="502920" y="1170432"/>
+            <a:ext cx="11155680" cy="411480"/>
+          </a:xfrm>
+          <a:prstGeom prst="rect">
+            <a:avLst/>
+          </a:prstGeom>
+          <a:noFill/>
+          <a:ln/>
+        </p:spPr>
+        <p:txBody>
+          <a:bodyPr wrap="square" lIns="0" tIns="0" rIns="0" bIns="0" rtlCol="0" anchor="ctr"/>
+          <a:lstStyle/>
+          <a:p>
+            <a:pPr indent="0" marL="0">
+              <a:buNone/>
+            </a:pPr>
+            <a:r>
+              <a:rPr lang="en-US" sz="1500" dirty="0">
+                <a:solidFill>
+                  <a:srgbClr val="667085"/>
+                </a:solidFill>
+                <a:latin typeface="IBM Plex Sans" pitchFamily="34" charset="0"/>
+                <a:ea typeface="IBM Plex Sans" pitchFamily="34" charset="-122"/>
+                <a:cs typeface="IBM Plex Sans" pitchFamily="34" charset="-120"/>
+              </a:rPr>
+              <a:t>Devices away. Answer from memory on the worksheet.</a:t>
+            </a:r>
+            <a:endParaRPr lang="en-US" sz="1500" dirty="0"/>
+          </a:p>
+        </p:txBody>
+      </p:sp>
+      <p:sp>
+        <p:nvSpPr>
+          <p:cNvPr id="7" name="Shape 5"/>
+          <p:cNvSpPr/>
+          <p:nvPr/>
+        </p:nvSpPr>
+        <p:spPr>
+          <a:xfrm>
+            <a:off x="502920" y="1828800"/>
+            <a:ext cx="11155680" cy="1097280"/>
+          </a:xfrm>
+          <a:prstGeom prst="roundRect">
+            <a:avLst>
+              <a:gd name="adj" fmla="val 10000"/>
+            </a:avLst>
+          </a:prstGeom>
+          <a:solidFill>
+            <a:srgbClr val="FFFFFF"/>
+          </a:solidFill>
+          <a:ln w="15875">
+            <a:solidFill>
+              <a:srgbClr val="D9DEE7"/>
+            </a:solidFill>
+            <a:prstDash val="solid"/>
+          </a:ln>
+        </p:spPr>
+      </p:sp>
+      <p:sp>
+        <p:nvSpPr>
+          <p:cNvPr id="8" name="Text 6"/>
+          <p:cNvSpPr txBox="1"/>
+          <p:nvPr/>
+        </p:nvSpPr>
+        <p:spPr>
+          <a:xfrm>
+            <a:off x="914400" y="1938528"/>
+            <a:ext cx="9418320" cy="877824"/>
+          </a:xfrm>
+          <a:prstGeom prst="rect">
+            <a:avLst/>
+          </a:prstGeom>
+          <a:noFill/>
+          <a:ln/>
+        </p:spPr>
+        <p:txBody>
+          <a:bodyPr wrap="square" lIns="0" tIns="0" rIns="0" bIns="0" rtlCol="0" anchor="ctr"/>
+          <a:lstStyle/>
+          <a:p>
+            <a:pPr indent="0" marL="0">
+              <a:lnSpc>
+                <a:spcPct val="118000"/>
+              </a:lnSpc>
+              <a:buNone/>
+            </a:pPr>
+            <a:r>
+              <a:rPr lang="en-US" sz="1700" dirty="0">
+                <a:solidFill>
+                  <a:srgbClr val="101828"/>
+                </a:solidFill>
+                <a:latin typeface="IBM Plex Sans" pitchFamily="34" charset="0"/>
+                <a:ea typeface="IBM Plex Sans" pitchFamily="34" charset="-122"/>
+                <a:cs typeface="IBM Plex Sans" pitchFamily="34" charset="-120"/>
+              </a:rPr>
+              <a:t>State the difference between a count-controlled loop and a condition-controlled loop.</a:t>
+            </a:r>
+            <a:endParaRPr lang="en-US" sz="1700" dirty="0"/>
+          </a:p>
+        </p:txBody>
+      </p:sp>
+      <p:sp>
+        <p:nvSpPr>
+          <p:cNvPr id="9" name="Shape 7"/>
+          <p:cNvSpPr/>
+          <p:nvPr/>
+        </p:nvSpPr>
+        <p:spPr>
+          <a:xfrm>
+            <a:off x="10515600" y="2130552"/>
+            <a:ext cx="868680" cy="493776"/>
+          </a:xfrm>
+          <a:prstGeom prst="roundRect">
+            <a:avLst>
+              <a:gd name="adj" fmla="val 18519"/>
+            </a:avLst>
+          </a:prstGeom>
+          <a:solidFill>
+            <a:srgbClr val="EEF2FB"/>
+          </a:solidFill>
+          <a:ln/>
+        </p:spPr>
+      </p:sp>
+      <p:sp>
+        <p:nvSpPr>
+          <p:cNvPr id="10" name="Text 8"/>
+          <p:cNvSpPr txBox="1"/>
+          <p:nvPr/>
+        </p:nvSpPr>
+        <p:spPr>
+          <a:xfrm>
+            <a:off x="10515600" y="2130552"/>
+            <a:ext cx="868680" cy="493776"/>
+          </a:xfrm>
+          <a:prstGeom prst="rect">
+            <a:avLst/>
+          </a:prstGeom>
+          <a:noFill/>
+          <a:ln/>
+        </p:spPr>
+        <p:txBody>
+          <a:bodyPr wrap="square" lIns="0" tIns="0" rIns="0" bIns="0" rtlCol="0" anchor="ctr"/>
+          <a:lstStyle/>
+          <a:p>
+            <a:pPr algn="ctr" indent="0" marL="0">
+              <a:buNone/>
+            </a:pPr>
+            <a:r>
+              <a:rPr lang="en-US" sz="1500" b="1" dirty="0">
+                <a:solidFill>
+                  <a:srgbClr val="2D63FF"/>
+                </a:solidFill>
+                <a:latin typeface="IBM Plex Mono" pitchFamily="34" charset="0"/>
+                <a:ea typeface="IBM Plex Mono" pitchFamily="34" charset="-122"/>
+                <a:cs typeface="IBM Plex Mono" pitchFamily="34" charset="-120"/>
+              </a:rPr>
+              <a:t>[2]</a:t>
+            </a:r>
+            <a:endParaRPr lang="en-US" sz="1500" dirty="0"/>
+          </a:p>
+        </p:txBody>
+      </p:sp>
+      <p:sp>
+        <p:nvSpPr>
+          <p:cNvPr id="11" name="Shape 9"/>
+          <p:cNvSpPr/>
+          <p:nvPr/>
+        </p:nvSpPr>
+        <p:spPr>
+          <a:xfrm>
+            <a:off x="502920" y="3127248"/>
+            <a:ext cx="11155680" cy="1097280"/>
+          </a:xfrm>
+          <a:prstGeom prst="roundRect">
+            <a:avLst>
+              <a:gd name="adj" fmla="val 10000"/>
+            </a:avLst>
+          </a:prstGeom>
+          <a:solidFill>
+            <a:srgbClr val="FFFFFF"/>
+          </a:solidFill>
+          <a:ln w="15875">
+            <a:solidFill>
+              <a:srgbClr val="D9DEE7"/>
+            </a:solidFill>
+            <a:prstDash val="solid"/>
+          </a:ln>
+        </p:spPr>
+      </p:sp>
+      <p:sp>
+        <p:nvSpPr>
+          <p:cNvPr id="12" name="Text 10"/>
+          <p:cNvSpPr txBox="1"/>
+          <p:nvPr/>
+        </p:nvSpPr>
+        <p:spPr>
+          <a:xfrm>
+            <a:off x="914400" y="3236976"/>
+            <a:ext cx="9418320" cy="877824"/>
+          </a:xfrm>
+          <a:prstGeom prst="rect">
+            <a:avLst/>
+          </a:prstGeom>
+          <a:noFill/>
+          <a:ln/>
+        </p:spPr>
+        <p:txBody>
+          <a:bodyPr wrap="square" lIns="0" tIns="0" rIns="0" bIns="0" rtlCol="0" anchor="ctr"/>
+          <a:lstStyle/>
+          <a:p>
+            <a:pPr indent="0" marL="0">
+              <a:lnSpc>
+                <a:spcPct val="118000"/>
+              </a:lnSpc>
+              <a:buNone/>
+            </a:pPr>
+            <a:r>
+              <a:rPr lang="en-US" sz="1700" dirty="0">
+                <a:solidFill>
+                  <a:srgbClr val="101828"/>
+                </a:solidFill>
+                <a:latin typeface="IBM Plex Sans" pitchFamily="34" charset="0"/>
+                <a:ea typeface="IBM Plex Sans" pitchFamily="34" charset="-122"/>
+                <a:cs typeface="IBM Plex Sans" pitchFamily="34" charset="-120"/>
+              </a:rPr>
+              <a:t>A club stores its members in a table called Members, with the fields MemberID, Name, Year and Paid. Write an SQL query that returns the name of every member in Year 10 who has not paid.</a:t>
+            </a:r>
+            <a:endParaRPr lang="en-US" sz="1700" dirty="0"/>
+          </a:p>
+        </p:txBody>
+      </p:sp>
+      <p:sp>
+        <p:nvSpPr>
+          <p:cNvPr id="13" name="Shape 11"/>
+          <p:cNvSpPr/>
+          <p:nvPr/>
+        </p:nvSpPr>
+        <p:spPr>
+          <a:xfrm>
+            <a:off x="10515600" y="3429000"/>
+            <a:ext cx="868680" cy="493776"/>
+          </a:xfrm>
+          <a:prstGeom prst="roundRect">
+            <a:avLst>
+              <a:gd name="adj" fmla="val 18519"/>
+            </a:avLst>
+          </a:prstGeom>
+          <a:solidFill>
+            <a:srgbClr val="EEF2FB"/>
+          </a:solidFill>
+          <a:ln/>
+        </p:spPr>
+      </p:sp>
+      <p:sp>
+        <p:nvSpPr>
+          <p:cNvPr id="14" name="Text 12"/>
+          <p:cNvSpPr txBox="1"/>
+          <p:nvPr/>
+        </p:nvSpPr>
+        <p:spPr>
+          <a:xfrm>
+            <a:off x="10515600" y="3429000"/>
+            <a:ext cx="868680" cy="493776"/>
+          </a:xfrm>
+          <a:prstGeom prst="rect">
+            <a:avLst/>
+          </a:prstGeom>
+          <a:noFill/>
+          <a:ln/>
+        </p:spPr>
+        <p:txBody>
+          <a:bodyPr wrap="square" lIns="0" tIns="0" rIns="0" bIns="0" rtlCol="0" anchor="ctr"/>
+          <a:lstStyle/>
+          <a:p>
+            <a:pPr algn="ctr" indent="0" marL="0">
+              <a:buNone/>
+            </a:pPr>
+            <a:r>
+              <a:rPr lang="en-US" sz="1500" b="1" dirty="0">
+                <a:solidFill>
+                  <a:srgbClr val="2D63FF"/>
+                </a:solidFill>
+                <a:latin typeface="IBM Plex Mono" pitchFamily="34" charset="0"/>
+                <a:ea typeface="IBM Plex Mono" pitchFamily="34" charset="-122"/>
+                <a:cs typeface="IBM Plex Mono" pitchFamily="34" charset="-120"/>
+              </a:rPr>
+              <a:t>[3]</a:t>
+            </a:r>
+            <a:endParaRPr lang="en-US" sz="1500" dirty="0"/>
+          </a:p>
+        </p:txBody>
+      </p:sp>
+      <p:sp>
+        <p:nvSpPr>
+          <p:cNvPr id="15" name="Shape 13"/>
+          <p:cNvSpPr/>
+          <p:nvPr/>
+        </p:nvSpPr>
+        <p:spPr>
+          <a:xfrm>
+            <a:off x="502920" y="4425696"/>
+            <a:ext cx="11155680" cy="1097280"/>
+          </a:xfrm>
+          <a:prstGeom prst="roundRect">
+            <a:avLst>
+              <a:gd name="adj" fmla="val 10000"/>
+            </a:avLst>
+          </a:prstGeom>
+          <a:solidFill>
+            <a:srgbClr val="FFFFFF"/>
+          </a:solidFill>
+          <a:ln w="15875">
+            <a:solidFill>
+              <a:srgbClr val="D9DEE7"/>
+            </a:solidFill>
+            <a:prstDash val="solid"/>
+          </a:ln>
+        </p:spPr>
+      </p:sp>
+      <p:sp>
+        <p:nvSpPr>
+          <p:cNvPr id="16" name="Text 14"/>
+          <p:cNvSpPr txBox="1"/>
+          <p:nvPr/>
+        </p:nvSpPr>
+        <p:spPr>
+          <a:xfrm>
+            <a:off x="914400" y="4535424"/>
+            <a:ext cx="9418320" cy="877824"/>
+          </a:xfrm>
+          <a:prstGeom prst="rect">
+            <a:avLst/>
+          </a:prstGeom>
+          <a:noFill/>
+          <a:ln/>
+        </p:spPr>
+        <p:txBody>
+          <a:bodyPr wrap="square" lIns="0" tIns="0" rIns="0" bIns="0" rtlCol="0" anchor="ctr"/>
+          <a:lstStyle/>
+          <a:p>
+            <a:pPr indent="0" marL="0">
+              <a:lnSpc>
+                <a:spcPct val="118000"/>
+              </a:lnSpc>
+              <a:buNone/>
+            </a:pPr>
+            <a:r>
+              <a:rPr lang="en-US" sz="1700" dirty="0">
+                <a:solidFill>
+                  <a:srgbClr val="101828"/>
+                </a:solidFill>
+                <a:latin typeface="IBM Plex Sans" pitchFamily="34" charset="0"/>
+                <a:ea typeface="IBM Plex Sans" pitchFamily="34" charset="-122"/>
+                <a:cs typeface="IBM Plex Sans" pitchFamily="34" charset="-120"/>
+              </a:rPr>
+              <a:t>Eight runners' names are stored in a file. Write an algorithm that gives each runner a different lane from 1 to 8, chosen at random, and outputs the finished draw. Use the OCR Exam Reference Language or a language you know.</a:t>
+            </a:r>
+            <a:endParaRPr lang="en-US" sz="1700" dirty="0"/>
+          </a:p>
+        </p:txBody>
+      </p:sp>
+      <p:sp>
+        <p:nvSpPr>
+          <p:cNvPr id="17" name="Shape 15"/>
+          <p:cNvSpPr/>
+          <p:nvPr/>
+        </p:nvSpPr>
+        <p:spPr>
+          <a:xfrm>
+            <a:off x="10515600" y="4727448"/>
+            <a:ext cx="868680" cy="493776"/>
+          </a:xfrm>
+          <a:prstGeom prst="roundRect">
+            <a:avLst>
+              <a:gd name="adj" fmla="val 18519"/>
+            </a:avLst>
+          </a:prstGeom>
+          <a:solidFill>
+            <a:srgbClr val="EEF2FB"/>
+          </a:solidFill>
+          <a:ln/>
+        </p:spPr>
+      </p:sp>
+      <p:sp>
+        <p:nvSpPr>
+          <p:cNvPr id="18" name="Text 16"/>
+          <p:cNvSpPr txBox="1"/>
+          <p:nvPr/>
+        </p:nvSpPr>
+        <p:spPr>
+          <a:xfrm>
+            <a:off x="10515600" y="4727448"/>
+            <a:ext cx="868680" cy="493776"/>
+          </a:xfrm>
+          <a:prstGeom prst="rect">
+            <a:avLst/>
+          </a:prstGeom>
+          <a:noFill/>
+          <a:ln/>
+        </p:spPr>
+        <p:txBody>
+          <a:bodyPr wrap="square" lIns="0" tIns="0" rIns="0" bIns="0" rtlCol="0" anchor="ctr"/>
+          <a:lstStyle/>
+          <a:p>
+            <a:pPr algn="ctr" indent="0" marL="0">
+              <a:buNone/>
+            </a:pPr>
+            <a:r>
+              <a:rPr lang="en-US" sz="1500" b="1" dirty="0">
+                <a:solidFill>
+                  <a:srgbClr val="2D63FF"/>
+                </a:solidFill>
+                <a:latin typeface="IBM Plex Mono" pitchFamily="34" charset="0"/>
+                <a:ea typeface="IBM Plex Mono" pitchFamily="34" charset="-122"/>
+                <a:cs typeface="IBM Plex Mono" pitchFamily="34" charset="-120"/>
+              </a:rPr>
+              <a:t>[6]</a:t>
+            </a:r>
+            <a:endParaRPr lang="en-US" sz="1500" dirty="0"/>
+          </a:p>
+        </p:txBody>
+      </p:sp>
+    </p:spTree>
+  </p:cSld>
+  <p:clrMapOvr>
+    <a:masterClrMapping/>
+  </p:clrMapOvr>
+</p:sld>
+</file>
+
+<file path=ppt/slides/slide15.xml><?xml version="1.0" encoding="utf-8"?>
+<p:sld xmlns:a="http://schemas.openxmlformats.org/drawingml/2006/main" xmlns:r="http://schemas.openxmlformats.org/officeDocument/2006/relationships" xmlns:p="http://schemas.openxmlformats.org/presentationml/2006/main">
+  <p:cSld name="Slide 15">
     <p:bg>
       <p:bgPr>
         <a:solidFill>
